--- a/exports/pptx/lessons/middle-module-03-ayurveda-good-health/day-07-primary-source.pptx
+++ b/exports/pptx/lessons/middle-module-03-ayurveda-good-health/day-07-primary-source.pptx
@@ -16,9 +16,15 @@
     <p:sldId id="264" r:id="rId10"/>
     <p:sldId id="265" r:id="rId11"/>
     <p:sldId id="266" r:id="rId12"/>
+    <p:sldId id="267" r:id="rId13"/>
+    <p:sldId id="268" r:id="rId14"/>
+    <p:sldId id="269" r:id="rId15"/>
+    <p:sldId id="270" r:id="rId16"/>
+    <p:sldId id="271" r:id="rId17"/>
+    <p:sldId id="272" r:id="rId18"/>
   </p:sldIdLst>
   <p:notesMasterIdLst>
-    <p:notesMasterId r:id="rId13"/>
+    <p:notesMasterId r:id="rId19"/>
   </p:notesMasterIdLst>
   <p:sldSz cx="9144000" cy="5143500"/>
   <p:notesSz cx="5143500" cy="9144000"/>
@@ -712,6 +718,534 @@
             <a:fld id="{F7021451-1387-4CA6-816F-3879F97B5CBC}" type="slidenum">
               <a:rPr lang="en-US"/>
               <a:t>11</a:t>
+            </a:fld>
+            <a:endParaRPr lang="en-US"/>
+          </a:p>
+        </p:txBody>
+      </p:sp>
+    </p:spTree>
+    <p:extLst>
+      <p:ext uri="{BB962C8B-B14F-4D97-AF65-F5344CB8AC3E}">
+        <p14:creationId xmlns:p14="http://schemas.microsoft.com/office/powerpoint/2010/main" val="1024086991"/>
+      </p:ext>
+    </p:extLst>
+  </p:cSld>
+  <p:clrMapOvr>
+    <a:masterClrMapping/>
+  </p:clrMapOvr>
+</p:notes>
+</file>
+
+<file path=ppt/notesSlides/notesSlide12.xml><?xml version="1.0" encoding="utf-8"?>
+<p:notes xmlns:a="http://schemas.openxmlformats.org/drawingml/2006/main" xmlns:r="http://schemas.openxmlformats.org/officeDocument/2006/relationships" xmlns:p="http://schemas.openxmlformats.org/presentationml/2006/main">
+  <p:cSld>
+    <p:spTree>
+      <p:nvGrpSpPr>
+        <p:cNvPr id="1" name=""/>
+        <p:cNvGrpSpPr/>
+        <p:nvPr/>
+      </p:nvGrpSpPr>
+      <p:grpSpPr>
+        <a:xfrm>
+          <a:off x="0" y="0"/>
+          <a:ext cx="0" cy="0"/>
+          <a:chOff x="0" y="0"/>
+          <a:chExt cx="0" cy="0"/>
+        </a:xfrm>
+      </p:grpSpPr>
+      <p:sp>
+        <p:nvSpPr>
+          <p:cNvPr id="2" name="Slide Image Placeholder 1"/>
+          <p:cNvSpPr>
+            <a:spLocks noGrp="1" noRot="1" noChangeAspect="1"/>
+          </p:cNvSpPr>
+          <p:nvPr>
+            <p:ph type="sldImg"/>
+          </p:nvPr>
+        </p:nvSpPr>
+        <p:spPr/>
+      </p:sp>
+      <p:sp>
+        <p:nvSpPr>
+          <p:cNvPr id="3" name="Notes Placeholder 2"/>
+          <p:cNvSpPr>
+            <a:spLocks noGrp="1"/>
+          </p:cNvSpPr>
+          <p:nvPr>
+            <p:ph type="body" idx="1"/>
+          </p:nvPr>
+        </p:nvSpPr>
+        <p:spPr/>
+        <p:txBody>
+          <a:bodyPr/>
+          <a:lstStyle/>
+          <a:p>
+            <a:r>
+              <a:rPr lang="en-US" dirty="0"/>
+              <a:t/>
+            </a:r>
+            <a:endParaRPr lang="en-US" dirty="0"/>
+          </a:p>
+        </p:txBody>
+      </p:sp>
+      <p:sp>
+        <p:nvSpPr>
+          <p:cNvPr id="4" name="Slide Number Placeholder 3"/>
+          <p:cNvSpPr>
+            <a:spLocks noGrp="1"/>
+          </p:cNvSpPr>
+          <p:nvPr>
+            <p:ph type="sldNum" sz="quarter" idx="10"/>
+          </p:nvPr>
+        </p:nvSpPr>
+        <p:spPr/>
+        <p:txBody>
+          <a:bodyPr/>
+          <a:lstStyle/>
+          <a:p>
+            <a:fld id="{F7021451-1387-4CA6-816F-3879F97B5CBC}" type="slidenum">
+              <a:rPr lang="en-US"/>
+              <a:t>12</a:t>
+            </a:fld>
+            <a:endParaRPr lang="en-US"/>
+          </a:p>
+        </p:txBody>
+      </p:sp>
+    </p:spTree>
+    <p:extLst>
+      <p:ext uri="{BB962C8B-B14F-4D97-AF65-F5344CB8AC3E}">
+        <p14:creationId xmlns:p14="http://schemas.microsoft.com/office/powerpoint/2010/main" val="1024086991"/>
+      </p:ext>
+    </p:extLst>
+  </p:cSld>
+  <p:clrMapOvr>
+    <a:masterClrMapping/>
+  </p:clrMapOvr>
+</p:notes>
+</file>
+
+<file path=ppt/notesSlides/notesSlide13.xml><?xml version="1.0" encoding="utf-8"?>
+<p:notes xmlns:a="http://schemas.openxmlformats.org/drawingml/2006/main" xmlns:r="http://schemas.openxmlformats.org/officeDocument/2006/relationships" xmlns:p="http://schemas.openxmlformats.org/presentationml/2006/main">
+  <p:cSld>
+    <p:spTree>
+      <p:nvGrpSpPr>
+        <p:cNvPr id="1" name=""/>
+        <p:cNvGrpSpPr/>
+        <p:nvPr/>
+      </p:nvGrpSpPr>
+      <p:grpSpPr>
+        <a:xfrm>
+          <a:off x="0" y="0"/>
+          <a:ext cx="0" cy="0"/>
+          <a:chOff x="0" y="0"/>
+          <a:chExt cx="0" cy="0"/>
+        </a:xfrm>
+      </p:grpSpPr>
+      <p:sp>
+        <p:nvSpPr>
+          <p:cNvPr id="2" name="Slide Image Placeholder 1"/>
+          <p:cNvSpPr>
+            <a:spLocks noGrp="1" noRot="1" noChangeAspect="1"/>
+          </p:cNvSpPr>
+          <p:nvPr>
+            <p:ph type="sldImg"/>
+          </p:nvPr>
+        </p:nvSpPr>
+        <p:spPr/>
+      </p:sp>
+      <p:sp>
+        <p:nvSpPr>
+          <p:cNvPr id="3" name="Notes Placeholder 2"/>
+          <p:cNvSpPr>
+            <a:spLocks noGrp="1"/>
+          </p:cNvSpPr>
+          <p:nvPr>
+            <p:ph type="body" idx="1"/>
+          </p:nvPr>
+        </p:nvSpPr>
+        <p:spPr/>
+        <p:txBody>
+          <a:bodyPr/>
+          <a:lstStyle/>
+          <a:p>
+            <a:r>
+              <a:rPr lang="en-US" dirty="0"/>
+              <a:t/>
+            </a:r>
+            <a:endParaRPr lang="en-US" dirty="0"/>
+          </a:p>
+        </p:txBody>
+      </p:sp>
+      <p:sp>
+        <p:nvSpPr>
+          <p:cNvPr id="4" name="Slide Number Placeholder 3"/>
+          <p:cNvSpPr>
+            <a:spLocks noGrp="1"/>
+          </p:cNvSpPr>
+          <p:nvPr>
+            <p:ph type="sldNum" sz="quarter" idx="10"/>
+          </p:nvPr>
+        </p:nvSpPr>
+        <p:spPr/>
+        <p:txBody>
+          <a:bodyPr/>
+          <a:lstStyle/>
+          <a:p>
+            <a:fld id="{F7021451-1387-4CA6-816F-3879F97B5CBC}" type="slidenum">
+              <a:rPr lang="en-US"/>
+              <a:t>13</a:t>
+            </a:fld>
+            <a:endParaRPr lang="en-US"/>
+          </a:p>
+        </p:txBody>
+      </p:sp>
+    </p:spTree>
+    <p:extLst>
+      <p:ext uri="{BB962C8B-B14F-4D97-AF65-F5344CB8AC3E}">
+        <p14:creationId xmlns:p14="http://schemas.microsoft.com/office/powerpoint/2010/main" val="1024086991"/>
+      </p:ext>
+    </p:extLst>
+  </p:cSld>
+  <p:clrMapOvr>
+    <a:masterClrMapping/>
+  </p:clrMapOvr>
+</p:notes>
+</file>
+
+<file path=ppt/notesSlides/notesSlide14.xml><?xml version="1.0" encoding="utf-8"?>
+<p:notes xmlns:a="http://schemas.openxmlformats.org/drawingml/2006/main" xmlns:r="http://schemas.openxmlformats.org/officeDocument/2006/relationships" xmlns:p="http://schemas.openxmlformats.org/presentationml/2006/main">
+  <p:cSld>
+    <p:spTree>
+      <p:nvGrpSpPr>
+        <p:cNvPr id="1" name=""/>
+        <p:cNvGrpSpPr/>
+        <p:nvPr/>
+      </p:nvGrpSpPr>
+      <p:grpSpPr>
+        <a:xfrm>
+          <a:off x="0" y="0"/>
+          <a:ext cx="0" cy="0"/>
+          <a:chOff x="0" y="0"/>
+          <a:chExt cx="0" cy="0"/>
+        </a:xfrm>
+      </p:grpSpPr>
+      <p:sp>
+        <p:nvSpPr>
+          <p:cNvPr id="2" name="Slide Image Placeholder 1"/>
+          <p:cNvSpPr>
+            <a:spLocks noGrp="1" noRot="1" noChangeAspect="1"/>
+          </p:cNvSpPr>
+          <p:nvPr>
+            <p:ph type="sldImg"/>
+          </p:nvPr>
+        </p:nvSpPr>
+        <p:spPr/>
+      </p:sp>
+      <p:sp>
+        <p:nvSpPr>
+          <p:cNvPr id="3" name="Notes Placeholder 2"/>
+          <p:cNvSpPr>
+            <a:spLocks noGrp="1"/>
+          </p:cNvSpPr>
+          <p:nvPr>
+            <p:ph type="body" idx="1"/>
+          </p:nvPr>
+        </p:nvSpPr>
+        <p:spPr/>
+        <p:txBody>
+          <a:bodyPr/>
+          <a:lstStyle/>
+          <a:p>
+            <a:r>
+              <a:rPr lang="en-US" dirty="0"/>
+              <a:t/>
+            </a:r>
+            <a:endParaRPr lang="en-US" dirty="0"/>
+          </a:p>
+        </p:txBody>
+      </p:sp>
+      <p:sp>
+        <p:nvSpPr>
+          <p:cNvPr id="4" name="Slide Number Placeholder 3"/>
+          <p:cNvSpPr>
+            <a:spLocks noGrp="1"/>
+          </p:cNvSpPr>
+          <p:nvPr>
+            <p:ph type="sldNum" sz="quarter" idx="10"/>
+          </p:nvPr>
+        </p:nvSpPr>
+        <p:spPr/>
+        <p:txBody>
+          <a:bodyPr/>
+          <a:lstStyle/>
+          <a:p>
+            <a:fld id="{F7021451-1387-4CA6-816F-3879F97B5CBC}" type="slidenum">
+              <a:rPr lang="en-US"/>
+              <a:t>14</a:t>
+            </a:fld>
+            <a:endParaRPr lang="en-US"/>
+          </a:p>
+        </p:txBody>
+      </p:sp>
+    </p:spTree>
+    <p:extLst>
+      <p:ext uri="{BB962C8B-B14F-4D97-AF65-F5344CB8AC3E}">
+        <p14:creationId xmlns:p14="http://schemas.microsoft.com/office/powerpoint/2010/main" val="1024086991"/>
+      </p:ext>
+    </p:extLst>
+  </p:cSld>
+  <p:clrMapOvr>
+    <a:masterClrMapping/>
+  </p:clrMapOvr>
+</p:notes>
+</file>
+
+<file path=ppt/notesSlides/notesSlide15.xml><?xml version="1.0" encoding="utf-8"?>
+<p:notes xmlns:a="http://schemas.openxmlformats.org/drawingml/2006/main" xmlns:r="http://schemas.openxmlformats.org/officeDocument/2006/relationships" xmlns:p="http://schemas.openxmlformats.org/presentationml/2006/main">
+  <p:cSld>
+    <p:spTree>
+      <p:nvGrpSpPr>
+        <p:cNvPr id="1" name=""/>
+        <p:cNvGrpSpPr/>
+        <p:nvPr/>
+      </p:nvGrpSpPr>
+      <p:grpSpPr>
+        <a:xfrm>
+          <a:off x="0" y="0"/>
+          <a:ext cx="0" cy="0"/>
+          <a:chOff x="0" y="0"/>
+          <a:chExt cx="0" cy="0"/>
+        </a:xfrm>
+      </p:grpSpPr>
+      <p:sp>
+        <p:nvSpPr>
+          <p:cNvPr id="2" name="Slide Image Placeholder 1"/>
+          <p:cNvSpPr>
+            <a:spLocks noGrp="1" noRot="1" noChangeAspect="1"/>
+          </p:cNvSpPr>
+          <p:nvPr>
+            <p:ph type="sldImg"/>
+          </p:nvPr>
+        </p:nvSpPr>
+        <p:spPr/>
+      </p:sp>
+      <p:sp>
+        <p:nvSpPr>
+          <p:cNvPr id="3" name="Notes Placeholder 2"/>
+          <p:cNvSpPr>
+            <a:spLocks noGrp="1"/>
+          </p:cNvSpPr>
+          <p:nvPr>
+            <p:ph type="body" idx="1"/>
+          </p:nvPr>
+        </p:nvSpPr>
+        <p:spPr/>
+        <p:txBody>
+          <a:bodyPr/>
+          <a:lstStyle/>
+          <a:p>
+            <a:r>
+              <a:rPr lang="en-US" dirty="0"/>
+              <a:t/>
+            </a:r>
+            <a:endParaRPr lang="en-US" dirty="0"/>
+          </a:p>
+        </p:txBody>
+      </p:sp>
+      <p:sp>
+        <p:nvSpPr>
+          <p:cNvPr id="4" name="Slide Number Placeholder 3"/>
+          <p:cNvSpPr>
+            <a:spLocks noGrp="1"/>
+          </p:cNvSpPr>
+          <p:nvPr>
+            <p:ph type="sldNum" sz="quarter" idx="10"/>
+          </p:nvPr>
+        </p:nvSpPr>
+        <p:spPr/>
+        <p:txBody>
+          <a:bodyPr/>
+          <a:lstStyle/>
+          <a:p>
+            <a:fld id="{F7021451-1387-4CA6-816F-3879F97B5CBC}" type="slidenum">
+              <a:rPr lang="en-US"/>
+              <a:t>15</a:t>
+            </a:fld>
+            <a:endParaRPr lang="en-US"/>
+          </a:p>
+        </p:txBody>
+      </p:sp>
+    </p:spTree>
+    <p:extLst>
+      <p:ext uri="{BB962C8B-B14F-4D97-AF65-F5344CB8AC3E}">
+        <p14:creationId xmlns:p14="http://schemas.microsoft.com/office/powerpoint/2010/main" val="1024086991"/>
+      </p:ext>
+    </p:extLst>
+  </p:cSld>
+  <p:clrMapOvr>
+    <a:masterClrMapping/>
+  </p:clrMapOvr>
+</p:notes>
+</file>
+
+<file path=ppt/notesSlides/notesSlide16.xml><?xml version="1.0" encoding="utf-8"?>
+<p:notes xmlns:a="http://schemas.openxmlformats.org/drawingml/2006/main" xmlns:r="http://schemas.openxmlformats.org/officeDocument/2006/relationships" xmlns:p="http://schemas.openxmlformats.org/presentationml/2006/main">
+  <p:cSld>
+    <p:spTree>
+      <p:nvGrpSpPr>
+        <p:cNvPr id="1" name=""/>
+        <p:cNvGrpSpPr/>
+        <p:nvPr/>
+      </p:nvGrpSpPr>
+      <p:grpSpPr>
+        <a:xfrm>
+          <a:off x="0" y="0"/>
+          <a:ext cx="0" cy="0"/>
+          <a:chOff x="0" y="0"/>
+          <a:chExt cx="0" cy="0"/>
+        </a:xfrm>
+      </p:grpSpPr>
+      <p:sp>
+        <p:nvSpPr>
+          <p:cNvPr id="2" name="Slide Image Placeholder 1"/>
+          <p:cNvSpPr>
+            <a:spLocks noGrp="1" noRot="1" noChangeAspect="1"/>
+          </p:cNvSpPr>
+          <p:nvPr>
+            <p:ph type="sldImg"/>
+          </p:nvPr>
+        </p:nvSpPr>
+        <p:spPr/>
+      </p:sp>
+      <p:sp>
+        <p:nvSpPr>
+          <p:cNvPr id="3" name="Notes Placeholder 2"/>
+          <p:cNvSpPr>
+            <a:spLocks noGrp="1"/>
+          </p:cNvSpPr>
+          <p:nvPr>
+            <p:ph type="body" idx="1"/>
+          </p:nvPr>
+        </p:nvSpPr>
+        <p:spPr/>
+        <p:txBody>
+          <a:bodyPr/>
+          <a:lstStyle/>
+          <a:p>
+            <a:r>
+              <a:rPr lang="en-US" dirty="0"/>
+              <a:t/>
+            </a:r>
+            <a:endParaRPr lang="en-US" dirty="0"/>
+          </a:p>
+        </p:txBody>
+      </p:sp>
+      <p:sp>
+        <p:nvSpPr>
+          <p:cNvPr id="4" name="Slide Number Placeholder 3"/>
+          <p:cNvSpPr>
+            <a:spLocks noGrp="1"/>
+          </p:cNvSpPr>
+          <p:nvPr>
+            <p:ph type="sldNum" sz="quarter" idx="10"/>
+          </p:nvPr>
+        </p:nvSpPr>
+        <p:spPr/>
+        <p:txBody>
+          <a:bodyPr/>
+          <a:lstStyle/>
+          <a:p>
+            <a:fld id="{F7021451-1387-4CA6-816F-3879F97B5CBC}" type="slidenum">
+              <a:rPr lang="en-US"/>
+              <a:t>16</a:t>
+            </a:fld>
+            <a:endParaRPr lang="en-US"/>
+          </a:p>
+        </p:txBody>
+      </p:sp>
+    </p:spTree>
+    <p:extLst>
+      <p:ext uri="{BB962C8B-B14F-4D97-AF65-F5344CB8AC3E}">
+        <p14:creationId xmlns:p14="http://schemas.microsoft.com/office/powerpoint/2010/main" val="1024086991"/>
+      </p:ext>
+    </p:extLst>
+  </p:cSld>
+  <p:clrMapOvr>
+    <a:masterClrMapping/>
+  </p:clrMapOvr>
+</p:notes>
+</file>
+
+<file path=ppt/notesSlides/notesSlide17.xml><?xml version="1.0" encoding="utf-8"?>
+<p:notes xmlns:a="http://schemas.openxmlformats.org/drawingml/2006/main" xmlns:r="http://schemas.openxmlformats.org/officeDocument/2006/relationships" xmlns:p="http://schemas.openxmlformats.org/presentationml/2006/main">
+  <p:cSld>
+    <p:spTree>
+      <p:nvGrpSpPr>
+        <p:cNvPr id="1" name=""/>
+        <p:cNvGrpSpPr/>
+        <p:nvPr/>
+      </p:nvGrpSpPr>
+      <p:grpSpPr>
+        <a:xfrm>
+          <a:off x="0" y="0"/>
+          <a:ext cx="0" cy="0"/>
+          <a:chOff x="0" y="0"/>
+          <a:chExt cx="0" cy="0"/>
+        </a:xfrm>
+      </p:grpSpPr>
+      <p:sp>
+        <p:nvSpPr>
+          <p:cNvPr id="2" name="Slide Image Placeholder 1"/>
+          <p:cNvSpPr>
+            <a:spLocks noGrp="1" noRot="1" noChangeAspect="1"/>
+          </p:cNvSpPr>
+          <p:nvPr>
+            <p:ph type="sldImg"/>
+          </p:nvPr>
+        </p:nvSpPr>
+        <p:spPr/>
+      </p:sp>
+      <p:sp>
+        <p:nvSpPr>
+          <p:cNvPr id="3" name="Notes Placeholder 2"/>
+          <p:cNvSpPr>
+            <a:spLocks noGrp="1"/>
+          </p:cNvSpPr>
+          <p:nvPr>
+            <p:ph type="body" idx="1"/>
+          </p:nvPr>
+        </p:nvSpPr>
+        <p:spPr/>
+        <p:txBody>
+          <a:bodyPr/>
+          <a:lstStyle/>
+          <a:p>
+            <a:r>
+              <a:rPr lang="en-US" dirty="0"/>
+              <a:t/>
+            </a:r>
+            <a:endParaRPr lang="en-US" dirty="0"/>
+          </a:p>
+        </p:txBody>
+      </p:sp>
+      <p:sp>
+        <p:nvSpPr>
+          <p:cNvPr id="4" name="Slide Number Placeholder 3"/>
+          <p:cNvSpPr>
+            <a:spLocks noGrp="1"/>
+          </p:cNvSpPr>
+          <p:nvPr>
+            <p:ph type="sldNum" sz="quarter" idx="10"/>
+          </p:nvPr>
+        </p:nvSpPr>
+        <p:spPr/>
+        <p:txBody>
+          <a:bodyPr/>
+          <a:lstStyle/>
+          <a:p>
+            <a:fld id="{F7021451-1387-4CA6-816F-3879F97B5CBC}" type="slidenum">
+              <a:rPr lang="en-US"/>
+              <a:t>17</a:t>
             </a:fld>
             <a:endParaRPr lang="en-US"/>
           </a:p>
@@ -1965,102 +2499,6 @@
         </p:nvSpPr>
         <p:spPr>
           <a:xfrm>
-            <a:off x="406301" y="1223963"/>
-            <a:ext cx="8498026" cy="274290"/>
-          </a:xfrm>
-          <a:prstGeom prst="rect">
-            <a:avLst/>
-          </a:prstGeom>
-          <a:noFill/>
-          <a:ln/>
-        </p:spPr>
-        <p:txBody>
-          <a:bodyPr wrap="square" lIns="0" tIns="0" rIns="0" bIns="0" rtlCol="0" anchor="t"/>
-          <a:lstStyle/>
-          <a:p>
-            <a:pPr algn="l" indent="0" marL="0">
-              <a:lnSpc>
-                <a:spcPts val="2160"/>
-              </a:lnSpc>
-              <a:spcBef>
-                <a:spcPts val="600"/>
-              </a:spcBef>
-              <a:spcAft>
-                <a:spcPts val="800"/>
-              </a:spcAft>
-              <a:buNone/>
-            </a:pPr>
-            <a:r>
-              <a:rPr lang="en-US" sz="1800" b="1" dirty="0">
-                <a:solidFill>
-                  <a:srgbClr val="FE4447"/>
-                </a:solidFill>
-                <a:latin typeface="Georgia" pitchFamily="34" charset="0"/>
-                <a:ea typeface="Georgia" pitchFamily="34" charset="-122"/>
-                <a:cs typeface="Georgia" pitchFamily="34" charset="-120"/>
-              </a:rPr>
-              <a:t>Learning objective</a:t>
-            </a:r>
-            <a:endParaRPr lang="en-US" sz="1800" dirty="0"/>
-          </a:p>
-        </p:txBody>
-      </p:sp>
-      <p:sp>
-        <p:nvSpPr>
-          <p:cNvPr id="6" name="Text 4"/>
-          <p:cNvSpPr/>
-          <p:nvPr/>
-        </p:nvSpPr>
-        <p:spPr>
-          <a:xfrm>
-            <a:off x="406301" y="1637854"/>
-            <a:ext cx="8498026" cy="426541"/>
-          </a:xfrm>
-          <a:prstGeom prst="rect">
-            <a:avLst/>
-          </a:prstGeom>
-          <a:noFill/>
-          <a:ln/>
-        </p:spPr>
-        <p:txBody>
-          <a:bodyPr wrap="square" lIns="0" tIns="0" rIns="0" bIns="0" rtlCol="0" anchor="t"/>
-          <a:lstStyle/>
-          <a:p>
-            <a:pPr algn="l" indent="0" marL="0">
-              <a:lnSpc>
-                <a:spcPts val="1680"/>
-              </a:lnSpc>
-              <a:spcBef>
-                <a:spcPts val="300"/>
-              </a:spcBef>
-              <a:spcAft>
-                <a:spcPts val="300"/>
-              </a:spcAft>
-              <a:buNone/>
-            </a:pPr>
-            <a:r>
-              <a:rPr lang="en-US" sz="1200" dirty="0">
-                <a:solidFill>
-                  <a:srgbClr val="1C2833"/>
-                </a:solidFill>
-                <a:latin typeface="Arial" pitchFamily="34" charset="0"/>
-                <a:ea typeface="Arial" pitchFamily="34" charset="-122"/>
-                <a:cs typeface="Arial" pitchFamily="34" charset="-120"/>
-              </a:rPr>
-              <a:t>Students read BG 6.17 in IAST + translation, identify the five activities Krishna names as needing regulation, and connect each to a dinacharya practice.</a:t>
-            </a:r>
-            <a:endParaRPr lang="en-US" sz="1200" dirty="0"/>
-          </a:p>
-        </p:txBody>
-      </p:sp>
-      <p:sp>
-        <p:nvSpPr>
-          <p:cNvPr id="7" name="Text 5"/>
-          <p:cNvSpPr/>
-          <p:nvPr/>
-        </p:nvSpPr>
-        <p:spPr>
-          <a:xfrm>
             <a:off x="406301" y="4434929"/>
             <a:ext cx="8498026" cy="213271"/>
           </a:xfrm>
@@ -2205,7 +2643,7 @@
                 <a:ea typeface="Georgia" pitchFamily="34" charset="-122"/>
                 <a:cs typeface="Georgia" pitchFamily="34" charset="-120"/>
               </a:rPr>
-              <a:t>Teacher notes</a:t>
+              <a:t>The five activities (10 min) (cont.)</a:t>
             </a:r>
             <a:endParaRPr lang="en-US" sz="1800" dirty="0"/>
           </a:p>
@@ -2220,7 +2658,7 @@
         <p:spPr>
           <a:xfrm>
             <a:off x="406301" y="870942"/>
-            <a:ext cx="8498026" cy="426541"/>
+            <a:ext cx="8498026" cy="213271"/>
           </a:xfrm>
           <a:prstGeom prst="rect">
             <a:avLst/>
@@ -2253,7 +2691,7 @@
                 <a:ea typeface="Arial" pitchFamily="34" charset="-122"/>
                 <a:cs typeface="Arial" pitchFamily="34" charset="-120"/>
               </a:rPr>
-              <a:t>– BG is a religious text for many traditions. Honour that. Here we use it as a primary source for the lifestyle-regulation principle. – The "yoga destroys sorrow" line is profound; let it land without over-interpretation.</a:t>
+              <a:t>Now connect to dinacharya:</a:t>
             </a:r>
             <a:endParaRPr lang="en-US" sz="1200" dirty="0"/>
           </a:p>
@@ -2262,6 +2700,248 @@
       <p:sp>
         <p:nvSpPr>
           <p:cNvPr id="5" name="Text 3"/>
+          <p:cNvSpPr/>
+          <p:nvPr/>
+        </p:nvSpPr>
+        <p:spPr>
+          <a:xfrm>
+            <a:off x="634901" y="1173063"/>
+            <a:ext cx="8102798" cy="1257002"/>
+          </a:xfrm>
+          <a:prstGeom prst="rect">
+            <a:avLst/>
+          </a:prstGeom>
+          <a:noFill/>
+          <a:ln/>
+        </p:spPr>
+        <p:txBody>
+          <a:bodyPr wrap="square" lIns="0" tIns="0" rIns="0" bIns="0" rtlCol="0" anchor="t"/>
+          <a:lstStyle/>
+          <a:p>
+            <a:pPr algn="l" marL="342900" indent="-342900">
+              <a:lnSpc>
+                <a:spcPts val="1620"/>
+              </a:lnSpc>
+              <a:spcAft>
+                <a:spcPts val="300"/>
+              </a:spcAft>
+              <a:buSzPct val="100000"/>
+              <a:buChar char="•"/>
+            </a:pPr>
+            <a:r>
+              <a:rPr lang="en-US" sz="1200" i="1" dirty="0">
+                <a:solidFill>
+                  <a:srgbClr val="1C2833"/>
+                </a:solidFill>
+                <a:latin typeface="Arial" pitchFamily="34" charset="0"/>
+                <a:ea typeface="Arial" pitchFamily="34" charset="-122"/>
+                <a:cs typeface="Arial" pitchFamily="34" charset="-120"/>
+              </a:rPr>
+              <a:t>Āhāra</a:t>
+            </a:r>
+            <a:pPr algn="l" indent="0" marL="0">
+              <a:lnSpc>
+                <a:spcPts val="1620"/>
+              </a:lnSpc>
+              <a:spcAft>
+                <a:spcPts val="300"/>
+              </a:spcAft>
+              <a:buNone/>
+            </a:pPr>
+            <a:r>
+              <a:rPr lang="en-US" sz="1200" dirty="0">
+                <a:solidFill>
+                  <a:srgbClr val="1C2833"/>
+                </a:solidFill>
+                <a:latin typeface="Arial" pitchFamily="34" charset="0"/>
+                <a:ea typeface="Arial" pitchFamily="34" charset="-122"/>
+                <a:cs typeface="Arial" pitchFamily="34" charset="-120"/>
+              </a:rPr>
+              <a:t> → eating timing + six tastes (Day 6)</a:t>
+            </a:r>
+            <a:endParaRPr lang="en-US" sz="1200" dirty="0"/>
+          </a:p>
+          <a:p>
+            <a:pPr algn="l" marL="342900" indent="-342900">
+              <a:lnSpc>
+                <a:spcPts val="1620"/>
+              </a:lnSpc>
+              <a:spcAft>
+                <a:spcPts val="300"/>
+              </a:spcAft>
+              <a:buSzPct val="100000"/>
+              <a:buChar char="•"/>
+            </a:pPr>
+            <a:r>
+              <a:rPr lang="en-US" sz="1200" i="1" dirty="0">
+                <a:solidFill>
+                  <a:srgbClr val="1C2833"/>
+                </a:solidFill>
+                <a:latin typeface="Arial" pitchFamily="34" charset="0"/>
+                <a:ea typeface="Arial" pitchFamily="34" charset="-122"/>
+                <a:cs typeface="Arial" pitchFamily="34" charset="-120"/>
+              </a:rPr>
+              <a:t>Vihāra</a:t>
+            </a:r>
+            <a:pPr algn="l" indent="0" marL="0">
+              <a:lnSpc>
+                <a:spcPts val="1620"/>
+              </a:lnSpc>
+              <a:spcAft>
+                <a:spcPts val="300"/>
+              </a:spcAft>
+              <a:buNone/>
+            </a:pPr>
+            <a:r>
+              <a:rPr lang="en-US" sz="1200" dirty="0">
+                <a:solidFill>
+                  <a:srgbClr val="1C2833"/>
+                </a:solidFill>
+                <a:latin typeface="Arial" pitchFamily="34" charset="0"/>
+                <a:ea typeface="Arial" pitchFamily="34" charset="-122"/>
+                <a:cs typeface="Arial" pitchFamily="34" charset="-120"/>
+              </a:rPr>
+              <a:t> → exercise (vyāyāma) + leisure</a:t>
+            </a:r>
+            <a:endParaRPr lang="en-US" sz="1200" dirty="0"/>
+          </a:p>
+          <a:p>
+            <a:pPr algn="l" marL="342900" indent="-342900">
+              <a:lnSpc>
+                <a:spcPts val="1620"/>
+              </a:lnSpc>
+              <a:spcAft>
+                <a:spcPts val="300"/>
+              </a:spcAft>
+              <a:buSzPct val="100000"/>
+              <a:buChar char="•"/>
+            </a:pPr>
+            <a:r>
+              <a:rPr lang="en-US" sz="1200" i="1" dirty="0">
+                <a:solidFill>
+                  <a:srgbClr val="1C2833"/>
+                </a:solidFill>
+                <a:latin typeface="Arial" pitchFamily="34" charset="0"/>
+                <a:ea typeface="Arial" pitchFamily="34" charset="-122"/>
+                <a:cs typeface="Arial" pitchFamily="34" charset="-120"/>
+              </a:rPr>
+              <a:t>Ceṣṭā in karma</a:t>
+            </a:r>
+            <a:pPr algn="l" indent="0" marL="0">
+              <a:lnSpc>
+                <a:spcPts val="1620"/>
+              </a:lnSpc>
+              <a:spcAft>
+                <a:spcPts val="300"/>
+              </a:spcAft>
+              <a:buNone/>
+            </a:pPr>
+            <a:r>
+              <a:rPr lang="en-US" sz="1200" dirty="0">
+                <a:solidFill>
+                  <a:srgbClr val="1C2833"/>
+                </a:solidFill>
+                <a:latin typeface="Arial" pitchFamily="34" charset="0"/>
+                <a:ea typeface="Arial" pitchFamily="34" charset="-122"/>
+                <a:cs typeface="Arial" pitchFamily="34" charset="-120"/>
+              </a:rPr>
+              <a:t> → balanced effort, neither lazy nor over-exerted</a:t>
+            </a:r>
+            <a:endParaRPr lang="en-US" sz="1200" dirty="0"/>
+          </a:p>
+          <a:p>
+            <a:pPr algn="l" marL="342900" indent="-342900">
+              <a:lnSpc>
+                <a:spcPts val="1620"/>
+              </a:lnSpc>
+              <a:spcAft>
+                <a:spcPts val="300"/>
+              </a:spcAft>
+              <a:buSzPct val="100000"/>
+              <a:buChar char="•"/>
+            </a:pPr>
+            <a:r>
+              <a:rPr lang="en-US" sz="1200" i="1" dirty="0">
+                <a:solidFill>
+                  <a:srgbClr val="1C2833"/>
+                </a:solidFill>
+                <a:latin typeface="Arial" pitchFamily="34" charset="0"/>
+                <a:ea typeface="Arial" pitchFamily="34" charset="-122"/>
+                <a:cs typeface="Arial" pitchFamily="34" charset="-120"/>
+              </a:rPr>
+              <a:t>Svapna</a:t>
+            </a:r>
+            <a:pPr algn="l" indent="0" marL="0">
+              <a:lnSpc>
+                <a:spcPts val="1620"/>
+              </a:lnSpc>
+              <a:spcAft>
+                <a:spcPts val="300"/>
+              </a:spcAft>
+              <a:buNone/>
+            </a:pPr>
+            <a:r>
+              <a:rPr lang="en-US" sz="1200" dirty="0">
+                <a:solidFill>
+                  <a:srgbClr val="1C2833"/>
+                </a:solidFill>
+                <a:latin typeface="Arial" pitchFamily="34" charset="0"/>
+                <a:ea typeface="Arial" pitchFamily="34" charset="-122"/>
+                <a:cs typeface="Arial" pitchFamily="34" charset="-120"/>
+              </a:rPr>
+              <a:t> → sleep by 10pm</a:t>
+            </a:r>
+            <a:endParaRPr lang="en-US" sz="1200" dirty="0"/>
+          </a:p>
+          <a:p>
+            <a:pPr algn="l" marL="342900" indent="-342900">
+              <a:lnSpc>
+                <a:spcPts val="1620"/>
+              </a:lnSpc>
+              <a:spcAft>
+                <a:spcPts val="300"/>
+              </a:spcAft>
+              <a:buSzPct val="100000"/>
+              <a:buChar char="•"/>
+            </a:pPr>
+            <a:r>
+              <a:rPr lang="en-US" sz="1200" i="1" dirty="0">
+                <a:solidFill>
+                  <a:srgbClr val="1C2833"/>
+                </a:solidFill>
+                <a:latin typeface="Arial" pitchFamily="34" charset="0"/>
+                <a:ea typeface="Arial" pitchFamily="34" charset="-122"/>
+                <a:cs typeface="Arial" pitchFamily="34" charset="-120"/>
+              </a:rPr>
+              <a:t>Avabodha</a:t>
+            </a:r>
+            <a:pPr algn="l" indent="0" marL="0">
+              <a:lnSpc>
+                <a:spcPts val="1620"/>
+              </a:lnSpc>
+              <a:spcAft>
+                <a:spcPts val="300"/>
+              </a:spcAft>
+              <a:buNone/>
+            </a:pPr>
+            <a:r>
+              <a:rPr lang="en-US" sz="1200" dirty="0">
+                <a:solidFill>
+                  <a:srgbClr val="1C2833"/>
+                </a:solidFill>
+                <a:latin typeface="Arial" pitchFamily="34" charset="0"/>
+                <a:ea typeface="Arial" pitchFamily="34" charset="-122"/>
+                <a:cs typeface="Arial" pitchFamily="34" charset="-120"/>
+              </a:rPr>
+              <a:t> → waking before sunrise (brāhma muhūrta)</a:t>
+            </a:r>
+            <a:endParaRPr lang="en-US" sz="1200" dirty="0"/>
+          </a:p>
+        </p:txBody>
+      </p:sp>
+      <p:sp>
+        <p:nvSpPr>
+          <p:cNvPr id="6" name="Text 4"/>
           <p:cNvSpPr/>
           <p:nvPr/>
         </p:nvSpPr>
@@ -2411,7 +3091,7 @@
                 <a:ea typeface="Georgia" pitchFamily="34" charset="-122"/>
                 <a:cs typeface="Georgia" pitchFamily="34" charset="-120"/>
               </a:rPr>
-              <a:t>Citation(s) used</a:t>
+              <a:t>The five activities (10 min) (cont.)</a:t>
             </a:r>
             <a:endParaRPr lang="en-US" sz="1800" dirty="0"/>
           </a:p>
@@ -2426,7 +3106,7 @@
         <p:spPr>
           <a:xfrm>
             <a:off x="406301" y="870942"/>
-            <a:ext cx="8498026" cy="436066"/>
+            <a:ext cx="8498026" cy="426541"/>
           </a:xfrm>
           <a:prstGeom prst="rect">
             <a:avLst/>
@@ -2451,6 +3131,29 @@
               <a:buNone/>
             </a:pPr>
             <a:r>
+              <a:rPr lang="en-US" sz="1200" b="1" dirty="0">
+                <a:solidFill>
+                  <a:srgbClr val="1C2833"/>
+                </a:solidFill>
+                <a:latin typeface="Arial" pitchFamily="34" charset="0"/>
+                <a:ea typeface="Arial" pitchFamily="34" charset="-122"/>
+                <a:cs typeface="Arial" pitchFamily="34" charset="-120"/>
+              </a:rPr>
+              <a:t>Note:</a:t>
+            </a:r>
+            <a:pPr algn="l" indent="0" marL="0">
+              <a:lnSpc>
+                <a:spcPts val="1680"/>
+              </a:lnSpc>
+              <a:spcBef>
+                <a:spcPts val="300"/>
+              </a:spcBef>
+              <a:spcAft>
+                <a:spcPts val="300"/>
+              </a:spcAft>
+              <a:buNone/>
+            </a:pPr>
+            <a:r>
               <a:rPr lang="en-US" sz="1200" dirty="0">
                 <a:solidFill>
                   <a:srgbClr val="1C2833"/>
@@ -2459,7 +3162,7 @@
                 <a:ea typeface="Arial" pitchFamily="34" charset="-122"/>
                 <a:cs typeface="Arial" pitchFamily="34" charset="-120"/>
               </a:rPr>
-              <a:t>– BG 6.17 — vidya-karana RAG cache </a:t>
+              <a:t> the verse is from the </a:t>
             </a:r>
             <a:pPr algn="l" indent="0" marL="0">
               <a:lnSpc>
@@ -2474,6 +3177,29 @@
               <a:buNone/>
             </a:pPr>
             <a:r>
+              <a:rPr lang="en-US" sz="1200" i="1" dirty="0">
+                <a:solidFill>
+                  <a:srgbClr val="1C2833"/>
+                </a:solidFill>
+                <a:latin typeface="Arial" pitchFamily="34" charset="0"/>
+                <a:ea typeface="Arial" pitchFamily="34" charset="-122"/>
+                <a:cs typeface="Arial" pitchFamily="34" charset="-120"/>
+              </a:rPr>
+              <a:t>Bhagavad-gītā</a:t>
+            </a:r>
+            <a:pPr algn="l" indent="0" marL="0">
+              <a:lnSpc>
+                <a:spcPts val="1680"/>
+              </a:lnSpc>
+              <a:spcBef>
+                <a:spcPts val="300"/>
+              </a:spcBef>
+              <a:spcAft>
+                <a:spcPts val="300"/>
+              </a:spcAft>
+              <a:buNone/>
+            </a:pPr>
+            <a:r>
               <a:rPr lang="en-US" sz="1200" dirty="0">
                 <a:solidFill>
                   <a:srgbClr val="1C2833"/>
@@ -2482,15 +3208,1454 @@
                 <a:ea typeface="Arial" pitchFamily="34" charset="-122"/>
                 <a:cs typeface="Arial" pitchFamily="34" charset="-120"/>
               </a:rPr>
+              <a:t>, a philosophical-spiritual text. It frames regulated living as the foundation for </a:t>
+            </a:r>
+            <a:pPr algn="l" indent="0" marL="0">
+              <a:lnSpc>
+                <a:spcPts val="1680"/>
+              </a:lnSpc>
+              <a:spcBef>
+                <a:spcPts val="300"/>
+              </a:spcBef>
+              <a:spcAft>
+                <a:spcPts val="300"/>
+              </a:spcAft>
+              <a:buNone/>
+            </a:pPr>
+            <a:r>
+              <a:rPr lang="en-US" sz="1200" i="1" dirty="0">
+                <a:solidFill>
+                  <a:srgbClr val="1C2833"/>
+                </a:solidFill>
+                <a:latin typeface="Arial" pitchFamily="34" charset="0"/>
+                <a:ea typeface="Arial" pitchFamily="34" charset="-122"/>
+                <a:cs typeface="Arial" pitchFamily="34" charset="-120"/>
+              </a:rPr>
+              <a:t>yoga</a:t>
+            </a:r>
+            <a:pPr algn="l" indent="0" marL="0">
+              <a:lnSpc>
+                <a:spcPts val="1680"/>
+              </a:lnSpc>
+              <a:spcBef>
+                <a:spcPts val="300"/>
+              </a:spcBef>
+              <a:spcAft>
+                <a:spcPts val="300"/>
+              </a:spcAft>
+              <a:buNone/>
+            </a:pPr>
+            <a:r>
+              <a:rPr lang="en-US" sz="1200" dirty="0">
+                <a:solidFill>
+                  <a:srgbClr val="1C2833"/>
+                </a:solidFill>
+                <a:latin typeface="Arial" pitchFamily="34" charset="0"/>
+                <a:ea typeface="Arial" pitchFamily="34" charset="-122"/>
+                <a:cs typeface="Arial" pitchFamily="34" charset="-120"/>
+              </a:rPr>
+              <a:t> (the discipline of mind). Ayurveda picks up this same framework on the body-health side.</a:t>
+            </a:r>
+            <a:endParaRPr lang="en-US" sz="1200" dirty="0"/>
+          </a:p>
+        </p:txBody>
+      </p:sp>
+      <p:sp>
+        <p:nvSpPr>
+          <p:cNvPr id="5" name="Text 3"/>
+          <p:cNvSpPr/>
+          <p:nvPr/>
+        </p:nvSpPr>
+        <p:spPr>
+          <a:xfrm>
+            <a:off x="406301" y="4434929"/>
+            <a:ext cx="8498026" cy="213271"/>
+          </a:xfrm>
+          <a:prstGeom prst="rect">
+            <a:avLst/>
+          </a:prstGeom>
+          <a:noFill/>
+          <a:ln/>
+        </p:spPr>
+        <p:txBody>
+          <a:bodyPr wrap="square" lIns="0" tIns="0" rIns="0" bIns="0" rtlCol="0" anchor="t"/>
+          <a:lstStyle/>
+          <a:p>
+            <a:pPr algn="l" indent="0" marL="0">
+              <a:lnSpc>
+                <a:spcPts val="1680"/>
+              </a:lnSpc>
+              <a:spcBef>
+                <a:spcPts val="300"/>
+              </a:spcBef>
+              <a:spcAft>
+                <a:spcPts val="300"/>
+              </a:spcAft>
+              <a:buNone/>
+            </a:pPr>
+            <a:r>
+              <a:rPr lang="en-US" sz="1200" dirty="0">
+                <a:solidFill>
+                  <a:srgbClr val="1C2833"/>
+                </a:solidFill>
+                <a:latin typeface="Arial" pitchFamily="34" charset="0"/>
+                <a:ea typeface="Arial" pitchFamily="34" charset="-122"/>
+                <a:cs typeface="Arial" pitchFamily="34" charset="-120"/>
+              </a:rPr>
+              <a:t>Middle ·  · IKS Curriculum</a:t>
+            </a:r>
+            <a:endParaRPr lang="en-US" sz="1200" dirty="0"/>
+          </a:p>
+        </p:txBody>
+      </p:sp>
+    </p:spTree>
+  </p:cSld>
+  <p:clrMapOvr>
+    <a:masterClrMapping/>
+  </p:clrMapOvr>
+</p:sld>
+</file>
+
+<file path=ppt/slides/slide12.xml><?xml version="1.0" encoding="utf-8"?>
+<p:sld xmlns:a="http://schemas.openxmlformats.org/drawingml/2006/main" xmlns:r="http://schemas.openxmlformats.org/officeDocument/2006/relationships" xmlns:p="http://schemas.openxmlformats.org/presentationml/2006/main">
+  <p:cSld name="Slide 12">
+    <p:bg>
+      <p:bgPr>
+        <a:solidFill>
+          <a:srgbClr val="FFFFFF"/>
+        </a:solidFill>
+      </p:bgPr>
+    </p:bg>
+    <p:spTree>
+      <p:nvGrpSpPr>
+        <p:cNvPr id="1" name=""/>
+        <p:cNvGrpSpPr/>
+        <p:nvPr/>
+      </p:nvGrpSpPr>
+      <p:grpSpPr>
+        <a:xfrm>
+          <a:off x="0" y="0"/>
+          <a:ext cx="0" cy="0"/>
+          <a:chOff x="0" y="0"/>
+          <a:chExt cx="0" cy="0"/>
+        </a:xfrm>
+      </p:grpSpPr>
+      <p:sp>
+        <p:nvSpPr>
+          <p:cNvPr id="2" name="Text 0"/>
+          <p:cNvSpPr/>
+          <p:nvPr/>
+        </p:nvSpPr>
+        <p:spPr>
+          <a:xfrm>
+            <a:off x="0" y="0"/>
+            <a:ext cx="9144000" cy="101501"/>
+          </a:xfrm>
+          <a:prstGeom prst="rect">
+            <a:avLst/>
+          </a:prstGeom>
+          <a:solidFill>
+            <a:srgbClr val="277884"/>
+          </a:solidFill>
+          <a:ln/>
+        </p:spPr>
+        <p:txBody>
+          <a:bodyPr wrap="square" rtlCol="0" anchor="ctr"/>
+          <a:lstStyle/>
+          <a:p>
+            <a:pPr indent="0" marL="0">
+              <a:buNone/>
+            </a:pPr>
+            <a:endParaRPr lang="en-US" dirty="0"/>
+          </a:p>
+        </p:txBody>
+      </p:sp>
+      <p:sp>
+        <p:nvSpPr>
+          <p:cNvPr id="3" name="Text 1"/>
+          <p:cNvSpPr/>
+          <p:nvPr/>
+        </p:nvSpPr>
+        <p:spPr>
+          <a:xfrm>
+            <a:off x="406301" y="457051"/>
+            <a:ext cx="8498026" cy="274290"/>
+          </a:xfrm>
+          <a:prstGeom prst="rect">
+            <a:avLst/>
+          </a:prstGeom>
+          <a:noFill/>
+          <a:ln/>
+        </p:spPr>
+        <p:txBody>
+          <a:bodyPr wrap="square" lIns="0" tIns="0" rIns="0" bIns="0" rtlCol="0" anchor="t"/>
+          <a:lstStyle/>
+          <a:p>
+            <a:pPr algn="l" indent="0" marL="0">
+              <a:lnSpc>
+                <a:spcPts val="2160"/>
+              </a:lnSpc>
+              <a:spcBef>
+                <a:spcPts val="600"/>
+              </a:spcBef>
+              <a:spcAft>
+                <a:spcPts val="800"/>
+              </a:spcAft>
+              <a:buNone/>
+            </a:pPr>
+            <a:r>
+              <a:rPr lang="en-US" sz="1800" b="1" dirty="0">
+                <a:solidFill>
+                  <a:srgbClr val="FE4447"/>
+                </a:solidFill>
+                <a:latin typeface="Georgia" pitchFamily="34" charset="0"/>
+                <a:ea typeface="Georgia" pitchFamily="34" charset="-122"/>
+                <a:cs typeface="Georgia" pitchFamily="34" charset="-120"/>
+              </a:rPr>
+              <a:t>Discussion (8 min)</a:t>
+            </a:r>
+            <a:endParaRPr lang="en-US" sz="1800" dirty="0"/>
+          </a:p>
+        </p:txBody>
+      </p:sp>
+      <p:sp>
+        <p:nvSpPr>
+          <p:cNvPr id="4" name="Text 2"/>
+          <p:cNvSpPr/>
+          <p:nvPr/>
+        </p:nvSpPr>
+        <p:spPr>
+          <a:xfrm>
+            <a:off x="634901" y="883593"/>
+            <a:ext cx="8102798" cy="525661"/>
+          </a:xfrm>
+          <a:prstGeom prst="rect">
+            <a:avLst/>
+          </a:prstGeom>
+          <a:noFill/>
+          <a:ln/>
+        </p:spPr>
+        <p:txBody>
+          <a:bodyPr wrap="square" lIns="0" tIns="0" rIns="0" bIns="0" rtlCol="0" anchor="t"/>
+          <a:lstStyle/>
+          <a:p>
+            <a:pPr algn="l" marL="342900" indent="-342900">
+              <a:lnSpc>
+                <a:spcPts val="1620"/>
+              </a:lnSpc>
+              <a:spcAft>
+                <a:spcPts val="300"/>
+              </a:spcAft>
+              <a:buSzPct val="100000"/>
+              <a:buChar char="•"/>
+            </a:pPr>
+            <a:r>
+              <a:rPr lang="en-US" sz="1200" dirty="0">
+                <a:solidFill>
+                  <a:srgbClr val="1C2833"/>
+                </a:solidFill>
+                <a:latin typeface="Arial" pitchFamily="34" charset="0"/>
+                <a:ea typeface="Arial" pitchFamily="34" charset="-122"/>
+                <a:cs typeface="Arial" pitchFamily="34" charset="-120"/>
+              </a:rPr>
+              <a:t>Question: </a:t>
+            </a:r>
+            <a:pPr algn="l" indent="0" marL="0">
+              <a:lnSpc>
+                <a:spcPts val="1620"/>
+              </a:lnSpc>
+              <a:spcAft>
+                <a:spcPts val="300"/>
+              </a:spcAft>
+              <a:buNone/>
+            </a:pPr>
+            <a:r>
+              <a:rPr lang="en-US" sz="1200" i="1" dirty="0">
+                <a:solidFill>
+                  <a:srgbClr val="1C2833"/>
+                </a:solidFill>
+                <a:latin typeface="Arial" pitchFamily="34" charset="0"/>
+                <a:ea typeface="Arial" pitchFamily="34" charset="-122"/>
+                <a:cs typeface="Arial" pitchFamily="34" charset="-120"/>
+              </a:rPr>
+              <a:t>"Which of the five activities do you find HARDEST to regulate in your own life?"</a:t>
+            </a:r>
+            <a:endParaRPr lang="en-US" sz="1200" dirty="0"/>
+          </a:p>
+          <a:p>
+            <a:pPr algn="l" marL="342900" indent="-342900">
+              <a:lnSpc>
+                <a:spcPts val="1620"/>
+              </a:lnSpc>
+              <a:spcAft>
+                <a:spcPts val="300"/>
+              </a:spcAft>
+              <a:buSzPct val="100000"/>
+              <a:buChar char="•"/>
+            </a:pPr>
+            <a:r>
+              <a:rPr lang="en-US" sz="1200" dirty="0">
+                <a:solidFill>
+                  <a:srgbClr val="1C2833"/>
+                </a:solidFill>
+                <a:latin typeface="Arial" pitchFamily="34" charset="0"/>
+                <a:ea typeface="Arial" pitchFamily="34" charset="-122"/>
+                <a:cs typeface="Arial" pitchFamily="34" charset="-120"/>
+              </a:rPr>
+              <a:t>Take 4 student answers.</a:t>
+            </a:r>
+            <a:endParaRPr lang="en-US" sz="1200" dirty="0"/>
+          </a:p>
+        </p:txBody>
+      </p:sp>
+      <p:sp>
+        <p:nvSpPr>
+          <p:cNvPr id="5" name="Text 3"/>
+          <p:cNvSpPr/>
+          <p:nvPr/>
+        </p:nvSpPr>
+        <p:spPr>
+          <a:xfrm>
+            <a:off x="406301" y="4434929"/>
+            <a:ext cx="8498026" cy="213271"/>
+          </a:xfrm>
+          <a:prstGeom prst="rect">
+            <a:avLst/>
+          </a:prstGeom>
+          <a:noFill/>
+          <a:ln/>
+        </p:spPr>
+        <p:txBody>
+          <a:bodyPr wrap="square" lIns="0" tIns="0" rIns="0" bIns="0" rtlCol="0" anchor="t"/>
+          <a:lstStyle/>
+          <a:p>
+            <a:pPr algn="l" indent="0" marL="0">
+              <a:lnSpc>
+                <a:spcPts val="1680"/>
+              </a:lnSpc>
+              <a:spcBef>
+                <a:spcPts val="300"/>
+              </a:spcBef>
+              <a:spcAft>
+                <a:spcPts val="300"/>
+              </a:spcAft>
+              <a:buNone/>
+            </a:pPr>
+            <a:r>
+              <a:rPr lang="en-US" sz="1200" dirty="0">
+                <a:solidFill>
+                  <a:srgbClr val="1C2833"/>
+                </a:solidFill>
+                <a:latin typeface="Arial" pitchFamily="34" charset="0"/>
+                <a:ea typeface="Arial" pitchFamily="34" charset="-122"/>
+                <a:cs typeface="Arial" pitchFamily="34" charset="-120"/>
+              </a:rPr>
+              <a:t>Middle ·  · IKS Curriculum</a:t>
+            </a:r>
+            <a:endParaRPr lang="en-US" sz="1200" dirty="0"/>
+          </a:p>
+        </p:txBody>
+      </p:sp>
+    </p:spTree>
+  </p:cSld>
+  <p:clrMapOvr>
+    <a:masterClrMapping/>
+  </p:clrMapOvr>
+</p:sld>
+</file>
+
+<file path=ppt/slides/slide13.xml><?xml version="1.0" encoding="utf-8"?>
+<p:sld xmlns:a="http://schemas.openxmlformats.org/drawingml/2006/main" xmlns:r="http://schemas.openxmlformats.org/officeDocument/2006/relationships" xmlns:p="http://schemas.openxmlformats.org/presentationml/2006/main">
+  <p:cSld name="Slide 13">
+    <p:bg>
+      <p:bgPr>
+        <a:solidFill>
+          <a:srgbClr val="FFFFFF"/>
+        </a:solidFill>
+      </p:bgPr>
+    </p:bg>
+    <p:spTree>
+      <p:nvGrpSpPr>
+        <p:cNvPr id="1" name=""/>
+        <p:cNvGrpSpPr/>
+        <p:nvPr/>
+      </p:nvGrpSpPr>
+      <p:grpSpPr>
+        <a:xfrm>
+          <a:off x="0" y="0"/>
+          <a:ext cx="0" cy="0"/>
+          <a:chOff x="0" y="0"/>
+          <a:chExt cx="0" cy="0"/>
+        </a:xfrm>
+      </p:grpSpPr>
+      <p:sp>
+        <p:nvSpPr>
+          <p:cNvPr id="2" name="Text 0"/>
+          <p:cNvSpPr/>
+          <p:nvPr/>
+        </p:nvSpPr>
+        <p:spPr>
+          <a:xfrm>
+            <a:off x="0" y="0"/>
+            <a:ext cx="9144000" cy="101501"/>
+          </a:xfrm>
+          <a:prstGeom prst="rect">
+            <a:avLst/>
+          </a:prstGeom>
+          <a:solidFill>
+            <a:srgbClr val="277884"/>
+          </a:solidFill>
+          <a:ln/>
+        </p:spPr>
+        <p:txBody>
+          <a:bodyPr wrap="square" rtlCol="0" anchor="ctr"/>
+          <a:lstStyle/>
+          <a:p>
+            <a:pPr indent="0" marL="0">
+              <a:buNone/>
+            </a:pPr>
+            <a:endParaRPr lang="en-US" dirty="0"/>
+          </a:p>
+        </p:txBody>
+      </p:sp>
+      <p:sp>
+        <p:nvSpPr>
+          <p:cNvPr id="3" name="Text 1"/>
+          <p:cNvSpPr/>
+          <p:nvPr/>
+        </p:nvSpPr>
+        <p:spPr>
+          <a:xfrm>
+            <a:off x="406301" y="457051"/>
+            <a:ext cx="8498026" cy="274290"/>
+          </a:xfrm>
+          <a:prstGeom prst="rect">
+            <a:avLst/>
+          </a:prstGeom>
+          <a:noFill/>
+          <a:ln/>
+        </p:spPr>
+        <p:txBody>
+          <a:bodyPr wrap="square" lIns="0" tIns="0" rIns="0" bIns="0" rtlCol="0" anchor="t"/>
+          <a:lstStyle/>
+          <a:p>
+            <a:pPr algn="l" indent="0" marL="0">
+              <a:lnSpc>
+                <a:spcPts val="2160"/>
+              </a:lnSpc>
+              <a:spcBef>
+                <a:spcPts val="600"/>
+              </a:spcBef>
+              <a:spcAft>
+                <a:spcPts val="800"/>
+              </a:spcAft>
+              <a:buNone/>
+            </a:pPr>
+            <a:r>
+              <a:rPr lang="en-US" sz="1800" b="1" dirty="0">
+                <a:solidFill>
+                  <a:srgbClr val="FE4447"/>
+                </a:solidFill>
+                <a:latin typeface="Georgia" pitchFamily="34" charset="0"/>
+                <a:ea typeface="Georgia" pitchFamily="34" charset="-122"/>
+                <a:cs typeface="Georgia" pitchFamily="34" charset="-120"/>
+              </a:rPr>
+              <a:t>Wrap-up (2 min)</a:t>
+            </a:r>
+            <a:endParaRPr lang="en-US" sz="1800" dirty="0"/>
+          </a:p>
+        </p:txBody>
+      </p:sp>
+      <p:sp>
+        <p:nvSpPr>
+          <p:cNvPr id="4" name="Text 2"/>
+          <p:cNvSpPr/>
+          <p:nvPr/>
+        </p:nvSpPr>
+        <p:spPr>
+          <a:xfrm>
+            <a:off x="634901" y="883593"/>
+            <a:ext cx="8102798" cy="281880"/>
+          </a:xfrm>
+          <a:prstGeom prst="rect">
+            <a:avLst/>
+          </a:prstGeom>
+          <a:noFill/>
+          <a:ln/>
+        </p:spPr>
+        <p:txBody>
+          <a:bodyPr wrap="square" lIns="0" tIns="0" rIns="0" bIns="0" rtlCol="0" anchor="t"/>
+          <a:lstStyle/>
+          <a:p>
+            <a:pPr algn="l" marL="342900" indent="-342900">
+              <a:lnSpc>
+                <a:spcPts val="1620"/>
+              </a:lnSpc>
+              <a:spcAft>
+                <a:spcPts val="300"/>
+              </a:spcAft>
+              <a:buSzPct val="100000"/>
+              <a:buChar char="•"/>
+            </a:pPr>
+            <a:r>
+              <a:rPr lang="en-US" sz="1200" dirty="0">
+                <a:solidFill>
+                  <a:srgbClr val="1C2833"/>
+                </a:solidFill>
+                <a:latin typeface="Arial" pitchFamily="34" charset="0"/>
+                <a:ea typeface="Arial" pitchFamily="34" charset="-122"/>
+                <a:cs typeface="Arial" pitchFamily="34" charset="-120"/>
+              </a:rPr>
+              <a:t>Preview Day 8: </a:t>
+            </a:r>
+            <a:pPr algn="l" indent="0" marL="0">
+              <a:lnSpc>
+                <a:spcPts val="1620"/>
+              </a:lnSpc>
+              <a:spcAft>
+                <a:spcPts val="300"/>
+              </a:spcAft>
+              <a:buNone/>
+            </a:pPr>
+            <a:r>
+              <a:rPr lang="en-US" sz="1200" i="1" dirty="0">
+                <a:solidFill>
+                  <a:srgbClr val="1C2833"/>
+                </a:solidFill>
+                <a:latin typeface="Arial" pitchFamily="34" charset="0"/>
+                <a:ea typeface="Arial" pitchFamily="34" charset="-122"/>
+                <a:cs typeface="Arial" pitchFamily="34" charset="-120"/>
+              </a:rPr>
+              <a:t>"Tomorrow — start designing your own 7-day dinacharya."</a:t>
+            </a:r>
+            <a:endParaRPr lang="en-US" sz="1200" dirty="0"/>
+          </a:p>
+        </p:txBody>
+      </p:sp>
+      <p:sp>
+        <p:nvSpPr>
+          <p:cNvPr id="5" name="Text 3"/>
+          <p:cNvSpPr/>
+          <p:nvPr/>
+        </p:nvSpPr>
+        <p:spPr>
+          <a:xfrm>
+            <a:off x="406301" y="4434929"/>
+            <a:ext cx="8498026" cy="213271"/>
+          </a:xfrm>
+          <a:prstGeom prst="rect">
+            <a:avLst/>
+          </a:prstGeom>
+          <a:noFill/>
+          <a:ln/>
+        </p:spPr>
+        <p:txBody>
+          <a:bodyPr wrap="square" lIns="0" tIns="0" rIns="0" bIns="0" rtlCol="0" anchor="t"/>
+          <a:lstStyle/>
+          <a:p>
+            <a:pPr algn="l" indent="0" marL="0">
+              <a:lnSpc>
+                <a:spcPts val="1680"/>
+              </a:lnSpc>
+              <a:spcBef>
+                <a:spcPts val="300"/>
+              </a:spcBef>
+              <a:spcAft>
+                <a:spcPts val="300"/>
+              </a:spcAft>
+              <a:buNone/>
+            </a:pPr>
+            <a:r>
+              <a:rPr lang="en-US" sz="1200" dirty="0">
+                <a:solidFill>
+                  <a:srgbClr val="1C2833"/>
+                </a:solidFill>
+                <a:latin typeface="Arial" pitchFamily="34" charset="0"/>
+                <a:ea typeface="Arial" pitchFamily="34" charset="-122"/>
+                <a:cs typeface="Arial" pitchFamily="34" charset="-120"/>
+              </a:rPr>
+              <a:t>Middle ·  · IKS Curriculum</a:t>
+            </a:r>
+            <a:endParaRPr lang="en-US" sz="1200" dirty="0"/>
+          </a:p>
+        </p:txBody>
+      </p:sp>
+    </p:spTree>
+  </p:cSld>
+  <p:clrMapOvr>
+    <a:masterClrMapping/>
+  </p:clrMapOvr>
+</p:sld>
+</file>
+
+<file path=ppt/slides/slide14.xml><?xml version="1.0" encoding="utf-8"?>
+<p:sld xmlns:a="http://schemas.openxmlformats.org/drawingml/2006/main" xmlns:r="http://schemas.openxmlformats.org/officeDocument/2006/relationships" xmlns:p="http://schemas.openxmlformats.org/presentationml/2006/main">
+  <p:cSld name="Slide 14">
+    <p:bg>
+      <p:bgPr>
+        <a:solidFill>
+          <a:srgbClr val="FFFFFF"/>
+        </a:solidFill>
+      </p:bgPr>
+    </p:bg>
+    <p:spTree>
+      <p:nvGrpSpPr>
+        <p:cNvPr id="1" name=""/>
+        <p:cNvGrpSpPr/>
+        <p:nvPr/>
+      </p:nvGrpSpPr>
+      <p:grpSpPr>
+        <a:xfrm>
+          <a:off x="0" y="0"/>
+          <a:ext cx="0" cy="0"/>
+          <a:chOff x="0" y="0"/>
+          <a:chExt cx="0" cy="0"/>
+        </a:xfrm>
+      </p:grpSpPr>
+      <p:sp>
+        <p:nvSpPr>
+          <p:cNvPr id="2" name="Text 0"/>
+          <p:cNvSpPr/>
+          <p:nvPr/>
+        </p:nvSpPr>
+        <p:spPr>
+          <a:xfrm>
+            <a:off x="0" y="0"/>
+            <a:ext cx="9144000" cy="101501"/>
+          </a:xfrm>
+          <a:prstGeom prst="rect">
+            <a:avLst/>
+          </a:prstGeom>
+          <a:solidFill>
+            <a:srgbClr val="277884"/>
+          </a:solidFill>
+          <a:ln/>
+        </p:spPr>
+        <p:txBody>
+          <a:bodyPr wrap="square" rtlCol="0" anchor="ctr"/>
+          <a:lstStyle/>
+          <a:p>
+            <a:pPr indent="0" marL="0">
+              <a:buNone/>
+            </a:pPr>
+            <a:endParaRPr lang="en-US" dirty="0"/>
+          </a:p>
+        </p:txBody>
+      </p:sp>
+      <p:sp>
+        <p:nvSpPr>
+          <p:cNvPr id="3" name="Text 1"/>
+          <p:cNvSpPr/>
+          <p:nvPr/>
+        </p:nvSpPr>
+        <p:spPr>
+          <a:xfrm>
+            <a:off x="406301" y="457051"/>
+            <a:ext cx="8498026" cy="274290"/>
+          </a:xfrm>
+          <a:prstGeom prst="rect">
+            <a:avLst/>
+          </a:prstGeom>
+          <a:noFill/>
+          <a:ln/>
+        </p:spPr>
+        <p:txBody>
+          <a:bodyPr wrap="square" lIns="0" tIns="0" rIns="0" bIns="0" rtlCol="0" anchor="t"/>
+          <a:lstStyle/>
+          <a:p>
+            <a:pPr algn="l" indent="0" marL="0">
+              <a:lnSpc>
+                <a:spcPts val="2160"/>
+              </a:lnSpc>
+              <a:spcBef>
+                <a:spcPts val="600"/>
+              </a:spcBef>
+              <a:spcAft>
+                <a:spcPts val="800"/>
+              </a:spcAft>
+              <a:buNone/>
+            </a:pPr>
+            <a:r>
+              <a:rPr lang="en-US" sz="1800" b="1" dirty="0">
+                <a:solidFill>
+                  <a:srgbClr val="FE4447"/>
+                </a:solidFill>
+                <a:latin typeface="Georgia" pitchFamily="34" charset="0"/>
+                <a:ea typeface="Georgia" pitchFamily="34" charset="-122"/>
+                <a:cs typeface="Georgia" pitchFamily="34" charset="-120"/>
+              </a:rPr>
+              <a:t>Homework</a:t>
+            </a:r>
+            <a:endParaRPr lang="en-US" sz="1800" dirty="0"/>
+          </a:p>
+        </p:txBody>
+      </p:sp>
+      <p:sp>
+        <p:nvSpPr>
+          <p:cNvPr id="4" name="Text 2"/>
+          <p:cNvSpPr/>
+          <p:nvPr/>
+        </p:nvSpPr>
+        <p:spPr>
+          <a:xfrm>
+            <a:off x="634901" y="883593"/>
+            <a:ext cx="8102798" cy="281880"/>
+          </a:xfrm>
+          <a:prstGeom prst="rect">
+            <a:avLst/>
+          </a:prstGeom>
+          <a:noFill/>
+          <a:ln/>
+        </p:spPr>
+        <p:txBody>
+          <a:bodyPr wrap="square" lIns="0" tIns="0" rIns="0" bIns="0" rtlCol="0" anchor="t"/>
+          <a:lstStyle/>
+          <a:p>
+            <a:pPr algn="l" marL="342900" indent="-342900">
+              <a:lnSpc>
+                <a:spcPts val="1620"/>
+              </a:lnSpc>
+              <a:spcAft>
+                <a:spcPts val="300"/>
+              </a:spcAft>
+              <a:buSzPct val="100000"/>
+              <a:buChar char="•"/>
+            </a:pPr>
+            <a:r>
+              <a:rPr lang="en-US" sz="1200" dirty="0">
+                <a:solidFill>
+                  <a:srgbClr val="1C2833"/>
+                </a:solidFill>
+                <a:latin typeface="Arial" pitchFamily="34" charset="0"/>
+                <a:ea typeface="Arial" pitchFamily="34" charset="-122"/>
+                <a:cs typeface="Arial" pitchFamily="34" charset="-120"/>
+              </a:rPr>
+              <a:t>Pick ONE of the five activities. Notice it tomorrow. Are you "yukta" (regulated) or out of balance?</a:t>
+            </a:r>
+            <a:endParaRPr lang="en-US" sz="1200" dirty="0"/>
+          </a:p>
+        </p:txBody>
+      </p:sp>
+      <p:sp>
+        <p:nvSpPr>
+          <p:cNvPr id="5" name="Text 3"/>
+          <p:cNvSpPr/>
+          <p:nvPr/>
+        </p:nvSpPr>
+        <p:spPr>
+          <a:xfrm>
+            <a:off x="406301" y="4434929"/>
+            <a:ext cx="8498026" cy="213271"/>
+          </a:xfrm>
+          <a:prstGeom prst="rect">
+            <a:avLst/>
+          </a:prstGeom>
+          <a:noFill/>
+          <a:ln/>
+        </p:spPr>
+        <p:txBody>
+          <a:bodyPr wrap="square" lIns="0" tIns="0" rIns="0" bIns="0" rtlCol="0" anchor="t"/>
+          <a:lstStyle/>
+          <a:p>
+            <a:pPr algn="l" indent="0" marL="0">
+              <a:lnSpc>
+                <a:spcPts val="1680"/>
+              </a:lnSpc>
+              <a:spcBef>
+                <a:spcPts val="300"/>
+              </a:spcBef>
+              <a:spcAft>
+                <a:spcPts val="300"/>
+              </a:spcAft>
+              <a:buNone/>
+            </a:pPr>
+            <a:r>
+              <a:rPr lang="en-US" sz="1200" dirty="0">
+                <a:solidFill>
+                  <a:srgbClr val="1C2833"/>
+                </a:solidFill>
+                <a:latin typeface="Arial" pitchFamily="34" charset="0"/>
+                <a:ea typeface="Arial" pitchFamily="34" charset="-122"/>
+                <a:cs typeface="Arial" pitchFamily="34" charset="-120"/>
+              </a:rPr>
+              <a:t>Middle ·  · IKS Curriculum</a:t>
+            </a:r>
+            <a:endParaRPr lang="en-US" sz="1200" dirty="0"/>
+          </a:p>
+        </p:txBody>
+      </p:sp>
+    </p:spTree>
+  </p:cSld>
+  <p:clrMapOvr>
+    <a:masterClrMapping/>
+  </p:clrMapOvr>
+</p:sld>
+</file>
+
+<file path=ppt/slides/slide15.xml><?xml version="1.0" encoding="utf-8"?>
+<p:sld xmlns:a="http://schemas.openxmlformats.org/drawingml/2006/main" xmlns:r="http://schemas.openxmlformats.org/officeDocument/2006/relationships" xmlns:p="http://schemas.openxmlformats.org/presentationml/2006/main">
+  <p:cSld name="Slide 15">
+    <p:bg>
+      <p:bgPr>
+        <a:solidFill>
+          <a:srgbClr val="FFFFFF"/>
+        </a:solidFill>
+      </p:bgPr>
+    </p:bg>
+    <p:spTree>
+      <p:nvGrpSpPr>
+        <p:cNvPr id="1" name=""/>
+        <p:cNvGrpSpPr/>
+        <p:nvPr/>
+      </p:nvGrpSpPr>
+      <p:grpSpPr>
+        <a:xfrm>
+          <a:off x="0" y="0"/>
+          <a:ext cx="0" cy="0"/>
+          <a:chOff x="0" y="0"/>
+          <a:chExt cx="0" cy="0"/>
+        </a:xfrm>
+      </p:grpSpPr>
+      <p:sp>
+        <p:nvSpPr>
+          <p:cNvPr id="2" name="Text 0"/>
+          <p:cNvSpPr/>
+          <p:nvPr/>
+        </p:nvSpPr>
+        <p:spPr>
+          <a:xfrm>
+            <a:off x="0" y="0"/>
+            <a:ext cx="9144000" cy="101501"/>
+          </a:xfrm>
+          <a:prstGeom prst="rect">
+            <a:avLst/>
+          </a:prstGeom>
+          <a:solidFill>
+            <a:srgbClr val="277884"/>
+          </a:solidFill>
+          <a:ln/>
+        </p:spPr>
+        <p:txBody>
+          <a:bodyPr wrap="square" rtlCol="0" anchor="ctr"/>
+          <a:lstStyle/>
+          <a:p>
+            <a:pPr indent="0" marL="0">
+              <a:buNone/>
+            </a:pPr>
+            <a:endParaRPr lang="en-US" dirty="0"/>
+          </a:p>
+        </p:txBody>
+      </p:sp>
+      <p:sp>
+        <p:nvSpPr>
+          <p:cNvPr id="3" name="Text 1"/>
+          <p:cNvSpPr/>
+          <p:nvPr/>
+        </p:nvSpPr>
+        <p:spPr>
+          <a:xfrm>
+            <a:off x="406301" y="457051"/>
+            <a:ext cx="8498026" cy="274290"/>
+          </a:xfrm>
+          <a:prstGeom prst="rect">
+            <a:avLst/>
+          </a:prstGeom>
+          <a:noFill/>
+          <a:ln/>
+        </p:spPr>
+        <p:txBody>
+          <a:bodyPr wrap="square" lIns="0" tIns="0" rIns="0" bIns="0" rtlCol="0" anchor="t"/>
+          <a:lstStyle/>
+          <a:p>
+            <a:pPr algn="l" indent="0" marL="0">
+              <a:lnSpc>
+                <a:spcPts val="2160"/>
+              </a:lnSpc>
+              <a:spcBef>
+                <a:spcPts val="600"/>
+              </a:spcBef>
+              <a:spcAft>
+                <a:spcPts val="800"/>
+              </a:spcAft>
+              <a:buNone/>
+            </a:pPr>
+            <a:r>
+              <a:rPr lang="en-US" sz="1800" b="1" dirty="0">
+                <a:solidFill>
+                  <a:srgbClr val="FE4447"/>
+                </a:solidFill>
+                <a:latin typeface="Georgia" pitchFamily="34" charset="0"/>
+                <a:ea typeface="Georgia" pitchFamily="34" charset="-122"/>
+                <a:cs typeface="Georgia" pitchFamily="34" charset="-120"/>
+              </a:rPr>
+              <a:t>Differentiation</a:t>
+            </a:r>
+            <a:endParaRPr lang="en-US" sz="1800" dirty="0"/>
+          </a:p>
+        </p:txBody>
+      </p:sp>
+      <p:sp>
+        <p:nvSpPr>
+          <p:cNvPr id="4" name="Text 2"/>
+          <p:cNvSpPr/>
+          <p:nvPr/>
+        </p:nvSpPr>
+        <p:spPr>
+          <a:xfrm>
+            <a:off x="634901" y="883593"/>
+            <a:ext cx="8102798" cy="525661"/>
+          </a:xfrm>
+          <a:prstGeom prst="rect">
+            <a:avLst/>
+          </a:prstGeom>
+          <a:noFill/>
+          <a:ln/>
+        </p:spPr>
+        <p:txBody>
+          <a:bodyPr wrap="square" lIns="0" tIns="0" rIns="0" bIns="0" rtlCol="0" anchor="t"/>
+          <a:lstStyle/>
+          <a:p>
+            <a:pPr algn="l" marL="342900" indent="-342900">
+              <a:lnSpc>
+                <a:spcPts val="1620"/>
+              </a:lnSpc>
+              <a:spcAft>
+                <a:spcPts val="300"/>
+              </a:spcAft>
+              <a:buSzPct val="100000"/>
+              <a:buChar char="•"/>
+            </a:pPr>
+            <a:r>
+              <a:rPr lang="en-US" sz="1200" b="1" dirty="0">
+                <a:solidFill>
+                  <a:srgbClr val="1C2833"/>
+                </a:solidFill>
+                <a:latin typeface="Arial" pitchFamily="34" charset="0"/>
+                <a:ea typeface="Arial" pitchFamily="34" charset="-122"/>
+                <a:cs typeface="Arial" pitchFamily="34" charset="-120"/>
+              </a:rPr>
+              <a:t>Tier up:</a:t>
+            </a:r>
+            <a:pPr algn="l" indent="0" marL="0">
+              <a:lnSpc>
+                <a:spcPts val="1620"/>
+              </a:lnSpc>
+              <a:spcAft>
+                <a:spcPts val="300"/>
+              </a:spcAft>
+              <a:buNone/>
+            </a:pPr>
+            <a:r>
+              <a:rPr lang="en-US" sz="1200" dirty="0">
+                <a:solidFill>
+                  <a:srgbClr val="1C2833"/>
+                </a:solidFill>
+                <a:latin typeface="Arial" pitchFamily="34" charset="0"/>
+                <a:ea typeface="Arial" pitchFamily="34" charset="-122"/>
+                <a:cs typeface="Arial" pitchFamily="34" charset="-120"/>
+              </a:rPr>
+              <a:t> Read Bryant (2009) commentary on BG 6.17.</a:t>
+            </a:r>
+            <a:endParaRPr lang="en-US" sz="1200" dirty="0"/>
+          </a:p>
+          <a:p>
+            <a:pPr algn="l" marL="342900" indent="-342900">
+              <a:lnSpc>
+                <a:spcPts val="1620"/>
+              </a:lnSpc>
+              <a:spcAft>
+                <a:spcPts val="300"/>
+              </a:spcAft>
+              <a:buSzPct val="100000"/>
+              <a:buChar char="•"/>
+            </a:pPr>
+            <a:r>
+              <a:rPr lang="en-US" sz="1200" b="1" dirty="0">
+                <a:solidFill>
+                  <a:srgbClr val="1C2833"/>
+                </a:solidFill>
+                <a:latin typeface="Arial" pitchFamily="34" charset="0"/>
+                <a:ea typeface="Arial" pitchFamily="34" charset="-122"/>
+                <a:cs typeface="Arial" pitchFamily="34" charset="-120"/>
+              </a:rPr>
+              <a:t>Tier down:</a:t>
+            </a:r>
+            <a:pPr algn="l" indent="0" marL="0">
+              <a:lnSpc>
+                <a:spcPts val="1620"/>
+              </a:lnSpc>
+              <a:spcAft>
+                <a:spcPts val="300"/>
+              </a:spcAft>
+              <a:buNone/>
+            </a:pPr>
+            <a:r>
+              <a:rPr lang="en-US" sz="1200" dirty="0">
+                <a:solidFill>
+                  <a:srgbClr val="1C2833"/>
+                </a:solidFill>
+                <a:latin typeface="Arial" pitchFamily="34" charset="0"/>
+                <a:ea typeface="Arial" pitchFamily="34" charset="-122"/>
+                <a:cs typeface="Arial" pitchFamily="34" charset="-120"/>
+              </a:rPr>
+              <a:t> Memorise the 5 activities only.</a:t>
+            </a:r>
+            <a:endParaRPr lang="en-US" sz="1200" dirty="0"/>
+          </a:p>
+        </p:txBody>
+      </p:sp>
+      <p:sp>
+        <p:nvSpPr>
+          <p:cNvPr id="5" name="Text 3"/>
+          <p:cNvSpPr/>
+          <p:nvPr/>
+        </p:nvSpPr>
+        <p:spPr>
+          <a:xfrm>
+            <a:off x="406301" y="4434929"/>
+            <a:ext cx="8498026" cy="213271"/>
+          </a:xfrm>
+          <a:prstGeom prst="rect">
+            <a:avLst/>
+          </a:prstGeom>
+          <a:noFill/>
+          <a:ln/>
+        </p:spPr>
+        <p:txBody>
+          <a:bodyPr wrap="square" lIns="0" tIns="0" rIns="0" bIns="0" rtlCol="0" anchor="t"/>
+          <a:lstStyle/>
+          <a:p>
+            <a:pPr algn="l" indent="0" marL="0">
+              <a:lnSpc>
+                <a:spcPts val="1680"/>
+              </a:lnSpc>
+              <a:spcBef>
+                <a:spcPts val="300"/>
+              </a:spcBef>
+              <a:spcAft>
+                <a:spcPts val="300"/>
+              </a:spcAft>
+              <a:buNone/>
+            </a:pPr>
+            <a:r>
+              <a:rPr lang="en-US" sz="1200" dirty="0">
+                <a:solidFill>
+                  <a:srgbClr val="1C2833"/>
+                </a:solidFill>
+                <a:latin typeface="Arial" pitchFamily="34" charset="0"/>
+                <a:ea typeface="Arial" pitchFamily="34" charset="-122"/>
+                <a:cs typeface="Arial" pitchFamily="34" charset="-120"/>
+              </a:rPr>
+              <a:t>Middle ·  · IKS Curriculum</a:t>
+            </a:r>
+            <a:endParaRPr lang="en-US" sz="1200" dirty="0"/>
+          </a:p>
+        </p:txBody>
+      </p:sp>
+    </p:spTree>
+  </p:cSld>
+  <p:clrMapOvr>
+    <a:masterClrMapping/>
+  </p:clrMapOvr>
+</p:sld>
+</file>
+
+<file path=ppt/slides/slide16.xml><?xml version="1.0" encoding="utf-8"?>
+<p:sld xmlns:a="http://schemas.openxmlformats.org/drawingml/2006/main" xmlns:r="http://schemas.openxmlformats.org/officeDocument/2006/relationships" xmlns:p="http://schemas.openxmlformats.org/presentationml/2006/main">
+  <p:cSld name="Slide 16">
+    <p:bg>
+      <p:bgPr>
+        <a:solidFill>
+          <a:srgbClr val="FFFFFF"/>
+        </a:solidFill>
+      </p:bgPr>
+    </p:bg>
+    <p:spTree>
+      <p:nvGrpSpPr>
+        <p:cNvPr id="1" name=""/>
+        <p:cNvGrpSpPr/>
+        <p:nvPr/>
+      </p:nvGrpSpPr>
+      <p:grpSpPr>
+        <a:xfrm>
+          <a:off x="0" y="0"/>
+          <a:ext cx="0" cy="0"/>
+          <a:chOff x="0" y="0"/>
+          <a:chExt cx="0" cy="0"/>
+        </a:xfrm>
+      </p:grpSpPr>
+      <p:sp>
+        <p:nvSpPr>
+          <p:cNvPr id="2" name="Text 0"/>
+          <p:cNvSpPr/>
+          <p:nvPr/>
+        </p:nvSpPr>
+        <p:spPr>
+          <a:xfrm>
+            <a:off x="0" y="0"/>
+            <a:ext cx="9144000" cy="101501"/>
+          </a:xfrm>
+          <a:prstGeom prst="rect">
+            <a:avLst/>
+          </a:prstGeom>
+          <a:solidFill>
+            <a:srgbClr val="277884"/>
+          </a:solidFill>
+          <a:ln/>
+        </p:spPr>
+        <p:txBody>
+          <a:bodyPr wrap="square" rtlCol="0" anchor="ctr"/>
+          <a:lstStyle/>
+          <a:p>
+            <a:pPr indent="0" marL="0">
+              <a:buNone/>
+            </a:pPr>
+            <a:endParaRPr lang="en-US" dirty="0"/>
+          </a:p>
+        </p:txBody>
+      </p:sp>
+      <p:sp>
+        <p:nvSpPr>
+          <p:cNvPr id="3" name="Text 1"/>
+          <p:cNvSpPr/>
+          <p:nvPr/>
+        </p:nvSpPr>
+        <p:spPr>
+          <a:xfrm>
+            <a:off x="406301" y="457051"/>
+            <a:ext cx="8498026" cy="274290"/>
+          </a:xfrm>
+          <a:prstGeom prst="rect">
+            <a:avLst/>
+          </a:prstGeom>
+          <a:noFill/>
+          <a:ln/>
+        </p:spPr>
+        <p:txBody>
+          <a:bodyPr wrap="square" lIns="0" tIns="0" rIns="0" bIns="0" rtlCol="0" anchor="t"/>
+          <a:lstStyle/>
+          <a:p>
+            <a:pPr algn="l" indent="0" marL="0">
+              <a:lnSpc>
+                <a:spcPts val="2160"/>
+              </a:lnSpc>
+              <a:spcBef>
+                <a:spcPts val="600"/>
+              </a:spcBef>
+              <a:spcAft>
+                <a:spcPts val="800"/>
+              </a:spcAft>
+              <a:buNone/>
+            </a:pPr>
+            <a:r>
+              <a:rPr lang="en-US" sz="1800" b="1" dirty="0">
+                <a:solidFill>
+                  <a:srgbClr val="FE4447"/>
+                </a:solidFill>
+                <a:latin typeface="Georgia" pitchFamily="34" charset="0"/>
+                <a:ea typeface="Georgia" pitchFamily="34" charset="-122"/>
+                <a:cs typeface="Georgia" pitchFamily="34" charset="-120"/>
+              </a:rPr>
+              <a:t>Teacher notes</a:t>
+            </a:r>
+            <a:endParaRPr lang="en-US" sz="1800" dirty="0"/>
+          </a:p>
+        </p:txBody>
+      </p:sp>
+      <p:sp>
+        <p:nvSpPr>
+          <p:cNvPr id="4" name="Text 2"/>
+          <p:cNvSpPr/>
+          <p:nvPr/>
+        </p:nvSpPr>
+        <p:spPr>
+          <a:xfrm>
+            <a:off x="634901" y="883593"/>
+            <a:ext cx="8102798" cy="731341"/>
+          </a:xfrm>
+          <a:prstGeom prst="rect">
+            <a:avLst/>
+          </a:prstGeom>
+          <a:noFill/>
+          <a:ln/>
+        </p:spPr>
+        <p:txBody>
+          <a:bodyPr wrap="square" lIns="0" tIns="0" rIns="0" bIns="0" rtlCol="0" anchor="t"/>
+          <a:lstStyle/>
+          <a:p>
+            <a:pPr algn="l" marL="342900" indent="-342900">
+              <a:lnSpc>
+                <a:spcPts val="1620"/>
+              </a:lnSpc>
+              <a:spcAft>
+                <a:spcPts val="300"/>
+              </a:spcAft>
+              <a:buSzPct val="100000"/>
+              <a:buChar char="•"/>
+            </a:pPr>
+            <a:r>
+              <a:rPr lang="en-US" sz="1200" dirty="0">
+                <a:solidFill>
+                  <a:srgbClr val="1C2833"/>
+                </a:solidFill>
+                <a:latin typeface="Arial" pitchFamily="34" charset="0"/>
+                <a:ea typeface="Arial" pitchFamily="34" charset="-122"/>
+                <a:cs typeface="Arial" pitchFamily="34" charset="-120"/>
+              </a:rPr>
+              <a:t>BG is a religious text for many traditions. Honour that. Here we use it as a primary source for the lifestyle-regulation principle.</a:t>
+            </a:r>
+            <a:endParaRPr lang="en-US" sz="1200" dirty="0"/>
+          </a:p>
+          <a:p>
+            <a:pPr algn="l" marL="342900" indent="-342900">
+              <a:lnSpc>
+                <a:spcPts val="1620"/>
+              </a:lnSpc>
+              <a:spcAft>
+                <a:spcPts val="300"/>
+              </a:spcAft>
+              <a:buSzPct val="100000"/>
+              <a:buChar char="•"/>
+            </a:pPr>
+            <a:r>
+              <a:rPr lang="en-US" sz="1200" dirty="0">
+                <a:solidFill>
+                  <a:srgbClr val="1C2833"/>
+                </a:solidFill>
+                <a:latin typeface="Arial" pitchFamily="34" charset="0"/>
+                <a:ea typeface="Arial" pitchFamily="34" charset="-122"/>
+                <a:cs typeface="Arial" pitchFamily="34" charset="-120"/>
+              </a:rPr>
+              <a:t>The "yoga destroys sorrow" line is profound; let it land without over-interpretation.</a:t>
+            </a:r>
+            <a:endParaRPr lang="en-US" sz="1200" dirty="0"/>
+          </a:p>
+        </p:txBody>
+      </p:sp>
+      <p:sp>
+        <p:nvSpPr>
+          <p:cNvPr id="5" name="Text 3"/>
+          <p:cNvSpPr/>
+          <p:nvPr/>
+        </p:nvSpPr>
+        <p:spPr>
+          <a:xfrm>
+            <a:off x="406301" y="4434929"/>
+            <a:ext cx="8498026" cy="213271"/>
+          </a:xfrm>
+          <a:prstGeom prst="rect">
+            <a:avLst/>
+          </a:prstGeom>
+          <a:noFill/>
+          <a:ln/>
+        </p:spPr>
+        <p:txBody>
+          <a:bodyPr wrap="square" lIns="0" tIns="0" rIns="0" bIns="0" rtlCol="0" anchor="t"/>
+          <a:lstStyle/>
+          <a:p>
+            <a:pPr algn="l" indent="0" marL="0">
+              <a:lnSpc>
+                <a:spcPts val="1680"/>
+              </a:lnSpc>
+              <a:spcBef>
+                <a:spcPts val="300"/>
+              </a:spcBef>
+              <a:spcAft>
+                <a:spcPts val="300"/>
+              </a:spcAft>
+              <a:buNone/>
+            </a:pPr>
+            <a:r>
+              <a:rPr lang="en-US" sz="1200" dirty="0">
+                <a:solidFill>
+                  <a:srgbClr val="1C2833"/>
+                </a:solidFill>
+                <a:latin typeface="Arial" pitchFamily="34" charset="0"/>
+                <a:ea typeface="Arial" pitchFamily="34" charset="-122"/>
+                <a:cs typeface="Arial" pitchFamily="34" charset="-120"/>
+              </a:rPr>
+              <a:t>Middle ·  · IKS Curriculum</a:t>
+            </a:r>
+            <a:endParaRPr lang="en-US" sz="1200" dirty="0"/>
+          </a:p>
+        </p:txBody>
+      </p:sp>
+    </p:spTree>
+  </p:cSld>
+  <p:clrMapOvr>
+    <a:masterClrMapping/>
+  </p:clrMapOvr>
+</p:sld>
+</file>
+
+<file path=ppt/slides/slide17.xml><?xml version="1.0" encoding="utf-8"?>
+<p:sld xmlns:a="http://schemas.openxmlformats.org/drawingml/2006/main" xmlns:r="http://schemas.openxmlformats.org/officeDocument/2006/relationships" xmlns:p="http://schemas.openxmlformats.org/presentationml/2006/main">
+  <p:cSld name="Slide 17">
+    <p:bg>
+      <p:bgPr>
+        <a:solidFill>
+          <a:srgbClr val="FFFFFF"/>
+        </a:solidFill>
+      </p:bgPr>
+    </p:bg>
+    <p:spTree>
+      <p:nvGrpSpPr>
+        <p:cNvPr id="1" name=""/>
+        <p:cNvGrpSpPr/>
+        <p:nvPr/>
+      </p:nvGrpSpPr>
+      <p:grpSpPr>
+        <a:xfrm>
+          <a:off x="0" y="0"/>
+          <a:ext cx="0" cy="0"/>
+          <a:chOff x="0" y="0"/>
+          <a:chExt cx="0" cy="0"/>
+        </a:xfrm>
+      </p:grpSpPr>
+      <p:sp>
+        <p:nvSpPr>
+          <p:cNvPr id="2" name="Text 0"/>
+          <p:cNvSpPr/>
+          <p:nvPr/>
+        </p:nvSpPr>
+        <p:spPr>
+          <a:xfrm>
+            <a:off x="0" y="0"/>
+            <a:ext cx="9144000" cy="101501"/>
+          </a:xfrm>
+          <a:prstGeom prst="rect">
+            <a:avLst/>
+          </a:prstGeom>
+          <a:solidFill>
+            <a:srgbClr val="277884"/>
+          </a:solidFill>
+          <a:ln/>
+        </p:spPr>
+        <p:txBody>
+          <a:bodyPr wrap="square" rtlCol="0" anchor="ctr"/>
+          <a:lstStyle/>
+          <a:p>
+            <a:pPr indent="0" marL="0">
+              <a:buNone/>
+            </a:pPr>
+            <a:endParaRPr lang="en-US" dirty="0"/>
+          </a:p>
+        </p:txBody>
+      </p:sp>
+      <p:sp>
+        <p:nvSpPr>
+          <p:cNvPr id="3" name="Text 1"/>
+          <p:cNvSpPr/>
+          <p:nvPr/>
+        </p:nvSpPr>
+        <p:spPr>
+          <a:xfrm>
+            <a:off x="406301" y="457051"/>
+            <a:ext cx="8498026" cy="274290"/>
+          </a:xfrm>
+          <a:prstGeom prst="rect">
+            <a:avLst/>
+          </a:prstGeom>
+          <a:noFill/>
+          <a:ln/>
+        </p:spPr>
+        <p:txBody>
+          <a:bodyPr wrap="square" lIns="0" tIns="0" rIns="0" bIns="0" rtlCol="0" anchor="t"/>
+          <a:lstStyle/>
+          <a:p>
+            <a:pPr algn="l" indent="0" marL="0">
+              <a:lnSpc>
+                <a:spcPts val="2160"/>
+              </a:lnSpc>
+              <a:spcBef>
+                <a:spcPts val="600"/>
+              </a:spcBef>
+              <a:spcAft>
+                <a:spcPts val="800"/>
+              </a:spcAft>
+              <a:buNone/>
+            </a:pPr>
+            <a:r>
+              <a:rPr lang="en-US" sz="1800" b="1" dirty="0">
+                <a:solidFill>
+                  <a:srgbClr val="FE4447"/>
+                </a:solidFill>
+                <a:latin typeface="Georgia" pitchFamily="34" charset="0"/>
+                <a:ea typeface="Georgia" pitchFamily="34" charset="-122"/>
+                <a:cs typeface="Georgia" pitchFamily="34" charset="-120"/>
+              </a:rPr>
+              <a:t>Citation(s) used</a:t>
+            </a:r>
+            <a:endParaRPr lang="en-US" sz="1800" dirty="0"/>
+          </a:p>
+        </p:txBody>
+      </p:sp>
+      <p:sp>
+        <p:nvSpPr>
+          <p:cNvPr id="4" name="Text 2"/>
+          <p:cNvSpPr/>
+          <p:nvPr/>
+        </p:nvSpPr>
+        <p:spPr>
+          <a:xfrm>
+            <a:off x="634901" y="883593"/>
+            <a:ext cx="8102798" cy="544711"/>
+          </a:xfrm>
+          <a:prstGeom prst="rect">
+            <a:avLst/>
+          </a:prstGeom>
+          <a:noFill/>
+          <a:ln/>
+        </p:spPr>
+        <p:txBody>
+          <a:bodyPr wrap="square" lIns="0" tIns="0" rIns="0" bIns="0" rtlCol="0" anchor="t"/>
+          <a:lstStyle/>
+          <a:p>
+            <a:pPr algn="l" marL="342900" indent="-342900">
+              <a:lnSpc>
+                <a:spcPts val="1620"/>
+              </a:lnSpc>
+              <a:spcAft>
+                <a:spcPts val="300"/>
+              </a:spcAft>
+              <a:buSzPct val="100000"/>
+              <a:buChar char="•"/>
+            </a:pPr>
+            <a:r>
+              <a:rPr lang="en-US" sz="1200" dirty="0">
+                <a:solidFill>
+                  <a:srgbClr val="1C2833"/>
+                </a:solidFill>
+                <a:latin typeface="Arial" pitchFamily="34" charset="0"/>
+                <a:ea typeface="Arial" pitchFamily="34" charset="-122"/>
+                <a:cs typeface="Arial" pitchFamily="34" charset="-120"/>
+              </a:rPr>
+              <a:t>BG 6.17 — vidya-karana RAG cache </a:t>
+            </a:r>
+            <a:pPr algn="l" indent="0" marL="0">
+              <a:lnSpc>
+                <a:spcPts val="1620"/>
+              </a:lnSpc>
+              <a:spcAft>
+                <a:spcPts val="300"/>
+              </a:spcAft>
+              <a:buNone/>
+            </a:pPr>
+            <a:r>
+              <a:rPr lang="en-US" sz="1200" dirty="0">
+                <a:solidFill>
+                  <a:srgbClr val="1C2833"/>
+                </a:solidFill>
+                <a:latin typeface="Arial" pitchFamily="34" charset="0"/>
+                <a:ea typeface="Arial" pitchFamily="34" charset="-122"/>
+                <a:cs typeface="Arial" pitchFamily="34" charset="-120"/>
+              </a:rPr>
               <a:t>day-04-dinacharya.json#chunks[0]</a:t>
             </a:r>
             <a:pPr algn="l" indent="0" marL="0">
               <a:lnSpc>
-                <a:spcPts val="1680"/>
-              </a:lnSpc>
-              <a:spcBef>
-                <a:spcPts val="300"/>
-              </a:spcBef>
+                <a:spcPts val="1620"/>
+              </a:lnSpc>
               <a:spcAft>
                 <a:spcPts val="300"/>
               </a:spcAft>
@@ -2505,7 +4670,31 @@
                 <a:ea typeface="Arial" pitchFamily="34" charset="-122"/>
                 <a:cs typeface="Arial" pitchFamily="34" charset="-120"/>
               </a:rPr>
-              <a:t>. – Bryant (2009) for Sāṅkhya-Yoga commentary on BG.</a:t>
+              <a:t>.</a:t>
+            </a:r>
+            <a:endParaRPr lang="en-US" sz="1200" dirty="0"/>
+          </a:p>
+          <a:p>
+            <a:pPr algn="l" marL="342900" indent="-342900">
+              <a:lnSpc>
+                <a:spcPts val="1620"/>
+              </a:lnSpc>
+              <a:spcAft>
+                <a:spcPts val="300"/>
+              </a:spcAft>
+              <a:buSzPct val="100000"/>
+              <a:buChar char="•"/>
+            </a:pPr>
+            <a:r>
+              <a:rPr lang="en-US" sz="1200" dirty="0">
+                <a:solidFill>
+                  <a:srgbClr val="1C2833"/>
+                </a:solidFill>
+                <a:latin typeface="Arial" pitchFamily="34" charset="0"/>
+                <a:ea typeface="Arial" pitchFamily="34" charset="-122"/>
+                <a:cs typeface="Arial" pitchFamily="34" charset="-120"/>
+              </a:rPr>
+              <a:t>Bryant (2009) for Sāṅkhya-Yoga commentary on BG.</a:t>
             </a:r>
             <a:endParaRPr lang="en-US" sz="1200" dirty="0"/>
           </a:p>
@@ -2663,7 +4852,7 @@
                 <a:ea typeface="Georgia" pitchFamily="34" charset="-122"/>
                 <a:cs typeface="Georgia" pitchFamily="34" charset="-120"/>
               </a:rPr>
-              <a:t>Materials</a:t>
+              <a:t>Learning objective</a:t>
             </a:r>
             <a:endParaRPr lang="en-US" sz="1800" dirty="0"/>
           </a:p>
@@ -2678,7 +4867,7 @@
         <p:spPr>
           <a:xfrm>
             <a:off x="406301" y="870942"/>
-            <a:ext cx="8498026" cy="213271"/>
+            <a:ext cx="8498026" cy="426541"/>
           </a:xfrm>
           <a:prstGeom prst="rect">
             <a:avLst/>
@@ -2711,7 +4900,7 @@
                 <a:ea typeface="Arial" pitchFamily="34" charset="-122"/>
                 <a:cs typeface="Arial" pitchFamily="34" charset="-120"/>
               </a:rPr>
-              <a:t>– Printed handout: BG 6.17 (Sanskrit, IAST, word-by-word, translation, brief commentary)</a:t>
+              <a:t>Students read BG 6.17 in IAST + translation, identify the five activities Krishna names as needing regulation, and connect each to a dinacharya practice.</a:t>
             </a:r>
             <a:endParaRPr lang="en-US" sz="1200" dirty="0"/>
           </a:p>
@@ -2869,7 +5058,7 @@
                 <a:ea typeface="Georgia" pitchFamily="34" charset="-122"/>
                 <a:cs typeface="Georgia" pitchFamily="34" charset="-120"/>
               </a:rPr>
-              <a:t>Flow</a:t>
+              <a:t>Materials</a:t>
             </a:r>
             <a:endParaRPr lang="en-US" sz="1800" dirty="0"/>
           </a:p>
@@ -2878,6 +5067,52 @@
       <p:sp>
         <p:nvSpPr>
           <p:cNvPr id="4" name="Text 2"/>
+          <p:cNvSpPr/>
+          <p:nvPr/>
+        </p:nvSpPr>
+        <p:spPr>
+          <a:xfrm>
+            <a:off x="634901" y="883593"/>
+            <a:ext cx="8102798" cy="281880"/>
+          </a:xfrm>
+          <a:prstGeom prst="rect">
+            <a:avLst/>
+          </a:prstGeom>
+          <a:noFill/>
+          <a:ln/>
+        </p:spPr>
+        <p:txBody>
+          <a:bodyPr wrap="square" lIns="0" tIns="0" rIns="0" bIns="0" rtlCol="0" anchor="t"/>
+          <a:lstStyle/>
+          <a:p>
+            <a:pPr algn="l" marL="342900" indent="-342900">
+              <a:lnSpc>
+                <a:spcPts val="1620"/>
+              </a:lnSpc>
+              <a:spcAft>
+                <a:spcPts val="300"/>
+              </a:spcAft>
+              <a:buSzPct val="100000"/>
+              <a:buChar char="•"/>
+            </a:pPr>
+            <a:r>
+              <a:rPr lang="en-US" sz="1200" dirty="0">
+                <a:solidFill>
+                  <a:srgbClr val="1C2833"/>
+                </a:solidFill>
+                <a:latin typeface="Arial" pitchFamily="34" charset="0"/>
+                <a:ea typeface="Arial" pitchFamily="34" charset="-122"/>
+                <a:cs typeface="Arial" pitchFamily="34" charset="-120"/>
+              </a:rPr>
+              <a:t>Printed handout: BG 6.17 (Sanskrit, IAST, word-by-word, translation, brief commentary)</a:t>
+            </a:r>
+            <a:endParaRPr lang="en-US" sz="1200" dirty="0"/>
+          </a:p>
+        </p:txBody>
+      </p:sp>
+      <p:sp>
+        <p:nvSpPr>
+          <p:cNvPr id="5" name="Text 3"/>
           <p:cNvSpPr/>
           <p:nvPr/>
         </p:nvSpPr>
@@ -3027,7 +5262,7 @@
                 <a:ea typeface="Georgia" pitchFamily="34" charset="-122"/>
                 <a:cs typeface="Georgia" pitchFamily="34" charset="-120"/>
               </a:rPr>
-              <a:t>Warm-up (5 min)</a:t>
+              <a:t>Flow</a:t>
             </a:r>
             <a:endParaRPr lang="en-US" sz="1800" dirty="0"/>
           </a:p>
@@ -3036,54 +5271,6 @@
       <p:sp>
         <p:nvSpPr>
           <p:cNvPr id="4" name="Text 2"/>
-          <p:cNvSpPr/>
-          <p:nvPr/>
-        </p:nvSpPr>
-        <p:spPr>
-          <a:xfrm>
-            <a:off x="406301" y="870942"/>
-            <a:ext cx="8498026" cy="213271"/>
-          </a:xfrm>
-          <a:prstGeom prst="rect">
-            <a:avLst/>
-          </a:prstGeom>
-          <a:noFill/>
-          <a:ln/>
-        </p:spPr>
-        <p:txBody>
-          <a:bodyPr wrap="square" lIns="0" tIns="0" rIns="0" bIns="0" rtlCol="0" anchor="t"/>
-          <a:lstStyle/>
-          <a:p>
-            <a:pPr algn="l" indent="0" marL="0">
-              <a:lnSpc>
-                <a:spcPts val="1680"/>
-              </a:lnSpc>
-              <a:spcBef>
-                <a:spcPts val="300"/>
-              </a:spcBef>
-              <a:spcAft>
-                <a:spcPts val="300"/>
-              </a:spcAft>
-              <a:buNone/>
-            </a:pPr>
-            <a:r>
-              <a:rPr lang="en-US" sz="1200" dirty="0">
-                <a:solidFill>
-                  <a:srgbClr val="1C2833"/>
-                </a:solidFill>
-                <a:latin typeface="Arial" pitchFamily="34" charset="0"/>
-                <a:ea typeface="Arial" pitchFamily="34" charset="-122"/>
-                <a:cs typeface="Arial" pitchFamily="34" charset="-120"/>
-              </a:rPr>
-              <a:t>Daily prompt + recall: dinacharya practice they tried.</a:t>
-            </a:r>
-            <a:endParaRPr lang="en-US" sz="1200" dirty="0"/>
-          </a:p>
-        </p:txBody>
-      </p:sp>
-      <p:sp>
-        <p:nvSpPr>
-          <p:cNvPr id="5" name="Text 3"/>
           <p:cNvSpPr/>
           <p:nvPr/>
         </p:nvSpPr>
@@ -3233,7 +5420,7 @@
                 <a:ea typeface="Georgia" pitchFamily="34" charset="-122"/>
                 <a:cs typeface="Georgia" pitchFamily="34" charset="-120"/>
               </a:rPr>
-              <a:t>The five activities (10 min)</a:t>
+              <a:t>Warm-up (5 min)</a:t>
             </a:r>
             <a:endParaRPr lang="en-US" sz="1800" dirty="0"/>
           </a:p>
@@ -3281,7 +5468,7 @@
                 <a:ea typeface="Arial" pitchFamily="34" charset="-122"/>
                 <a:cs typeface="Arial" pitchFamily="34" charset="-120"/>
               </a:rPr>
-              <a:t>Krishna names FIVE activities that need regulation:</a:t>
+              <a:t>Daily prompt + recall: dinacharya practice they tried.</a:t>
             </a:r>
             <a:endParaRPr lang="en-US" sz="1200" dirty="0"/>
           </a:p>
@@ -3295,702 +5482,7 @@
         </p:nvSpPr>
         <p:spPr>
           <a:xfrm>
-            <a:off x="634901" y="1173063"/>
-            <a:ext cx="8102798" cy="1257002"/>
-          </a:xfrm>
-          <a:prstGeom prst="rect">
-            <a:avLst/>
-          </a:prstGeom>
-          <a:noFill/>
-          <a:ln/>
-        </p:spPr>
-        <p:txBody>
-          <a:bodyPr wrap="square" lIns="0" tIns="0" rIns="0" bIns="0" rtlCol="0" anchor="t"/>
-          <a:lstStyle/>
-          <a:p>
-            <a:pPr algn="l" marL="342900" indent="-342900">
-              <a:lnSpc>
-                <a:spcPts val="1620"/>
-              </a:lnSpc>
-              <a:spcAft>
-                <a:spcPts val="300"/>
-              </a:spcAft>
-              <a:buSzPct val="100000"/>
-              <a:buChar char="•"/>
-            </a:pPr>
-            <a:r>
-              <a:rPr lang="en-US" sz="1200" i="1" dirty="0">
-                <a:solidFill>
-                  <a:srgbClr val="1C2833"/>
-                </a:solidFill>
-                <a:latin typeface="Arial" pitchFamily="34" charset="0"/>
-                <a:ea typeface="Arial" pitchFamily="34" charset="-122"/>
-                <a:cs typeface="Arial" pitchFamily="34" charset="-120"/>
-              </a:rPr>
-              <a:t>Āhāra</a:t>
-            </a:r>
-            <a:pPr algn="l" indent="0" marL="0">
-              <a:lnSpc>
-                <a:spcPts val="1620"/>
-              </a:lnSpc>
-              <a:spcAft>
-                <a:spcPts val="300"/>
-              </a:spcAft>
-              <a:buNone/>
-            </a:pPr>
-            <a:r>
-              <a:rPr lang="en-US" sz="1200" dirty="0">
-                <a:solidFill>
-                  <a:srgbClr val="1C2833"/>
-                </a:solidFill>
-                <a:latin typeface="Arial" pitchFamily="34" charset="0"/>
-                <a:ea typeface="Arial" pitchFamily="34" charset="-122"/>
-                <a:cs typeface="Arial" pitchFamily="34" charset="-120"/>
-              </a:rPr>
-              <a:t> — eating</a:t>
-            </a:r>
-            <a:endParaRPr lang="en-US" sz="1200" dirty="0"/>
-          </a:p>
-          <a:p>
-            <a:pPr algn="l" marL="342900" indent="-342900">
-              <a:lnSpc>
-                <a:spcPts val="1620"/>
-              </a:lnSpc>
-              <a:spcAft>
-                <a:spcPts val="300"/>
-              </a:spcAft>
-              <a:buSzPct val="100000"/>
-              <a:buChar char="•"/>
-            </a:pPr>
-            <a:r>
-              <a:rPr lang="en-US" sz="1200" i="1" dirty="0">
-                <a:solidFill>
-                  <a:srgbClr val="1C2833"/>
-                </a:solidFill>
-                <a:latin typeface="Arial" pitchFamily="34" charset="0"/>
-                <a:ea typeface="Arial" pitchFamily="34" charset="-122"/>
-                <a:cs typeface="Arial" pitchFamily="34" charset="-120"/>
-              </a:rPr>
-              <a:t>Vihāra</a:t>
-            </a:r>
-            <a:pPr algn="l" indent="0" marL="0">
-              <a:lnSpc>
-                <a:spcPts val="1620"/>
-              </a:lnSpc>
-              <a:spcAft>
-                <a:spcPts val="300"/>
-              </a:spcAft>
-              <a:buNone/>
-            </a:pPr>
-            <a:r>
-              <a:rPr lang="en-US" sz="1200" dirty="0">
-                <a:solidFill>
-                  <a:srgbClr val="1C2833"/>
-                </a:solidFill>
-                <a:latin typeface="Arial" pitchFamily="34" charset="0"/>
-                <a:ea typeface="Arial" pitchFamily="34" charset="-122"/>
-                <a:cs typeface="Arial" pitchFamily="34" charset="-120"/>
-              </a:rPr>
-              <a:t> — recreation, lifestyle</a:t>
-            </a:r>
-            <a:endParaRPr lang="en-US" sz="1200" dirty="0"/>
-          </a:p>
-          <a:p>
-            <a:pPr algn="l" marL="342900" indent="-342900">
-              <a:lnSpc>
-                <a:spcPts val="1620"/>
-              </a:lnSpc>
-              <a:spcAft>
-                <a:spcPts val="300"/>
-              </a:spcAft>
-              <a:buSzPct val="100000"/>
-              <a:buChar char="•"/>
-            </a:pPr>
-            <a:r>
-              <a:rPr lang="en-US" sz="1200" i="1" dirty="0">
-                <a:solidFill>
-                  <a:srgbClr val="1C2833"/>
-                </a:solidFill>
-                <a:latin typeface="Arial" pitchFamily="34" charset="0"/>
-                <a:ea typeface="Arial" pitchFamily="34" charset="-122"/>
-                <a:cs typeface="Arial" pitchFamily="34" charset="-120"/>
-              </a:rPr>
-              <a:t>Ceṣṭā in karma</a:t>
-            </a:r>
-            <a:pPr algn="l" indent="0" marL="0">
-              <a:lnSpc>
-                <a:spcPts val="1620"/>
-              </a:lnSpc>
-              <a:spcAft>
-                <a:spcPts val="300"/>
-              </a:spcAft>
-              <a:buNone/>
-            </a:pPr>
-            <a:r>
-              <a:rPr lang="en-US" sz="1200" dirty="0">
-                <a:solidFill>
-                  <a:srgbClr val="1C2833"/>
-                </a:solidFill>
-                <a:latin typeface="Arial" pitchFamily="34" charset="0"/>
-                <a:ea typeface="Arial" pitchFamily="34" charset="-122"/>
-                <a:cs typeface="Arial" pitchFamily="34" charset="-120"/>
-              </a:rPr>
-              <a:t> — effort in work</a:t>
-            </a:r>
-            <a:endParaRPr lang="en-US" sz="1200" dirty="0"/>
-          </a:p>
-          <a:p>
-            <a:pPr algn="l" marL="342900" indent="-342900">
-              <a:lnSpc>
-                <a:spcPts val="1620"/>
-              </a:lnSpc>
-              <a:spcAft>
-                <a:spcPts val="300"/>
-              </a:spcAft>
-              <a:buSzPct val="100000"/>
-              <a:buChar char="•"/>
-            </a:pPr>
-            <a:r>
-              <a:rPr lang="en-US" sz="1200" i="1" dirty="0">
-                <a:solidFill>
-                  <a:srgbClr val="1C2833"/>
-                </a:solidFill>
-                <a:latin typeface="Arial" pitchFamily="34" charset="0"/>
-                <a:ea typeface="Arial" pitchFamily="34" charset="-122"/>
-                <a:cs typeface="Arial" pitchFamily="34" charset="-120"/>
-              </a:rPr>
-              <a:t>Svapna</a:t>
-            </a:r>
-            <a:pPr algn="l" indent="0" marL="0">
-              <a:lnSpc>
-                <a:spcPts val="1620"/>
-              </a:lnSpc>
-              <a:spcAft>
-                <a:spcPts val="300"/>
-              </a:spcAft>
-              <a:buNone/>
-            </a:pPr>
-            <a:r>
-              <a:rPr lang="en-US" sz="1200" dirty="0">
-                <a:solidFill>
-                  <a:srgbClr val="1C2833"/>
-                </a:solidFill>
-                <a:latin typeface="Arial" pitchFamily="34" charset="0"/>
-                <a:ea typeface="Arial" pitchFamily="34" charset="-122"/>
-                <a:cs typeface="Arial" pitchFamily="34" charset="-120"/>
-              </a:rPr>
-              <a:t> — sleep</a:t>
-            </a:r>
-            <a:endParaRPr lang="en-US" sz="1200" dirty="0"/>
-          </a:p>
-          <a:p>
-            <a:pPr algn="l" marL="342900" indent="-342900">
-              <a:lnSpc>
-                <a:spcPts val="1620"/>
-              </a:lnSpc>
-              <a:spcAft>
-                <a:spcPts val="300"/>
-              </a:spcAft>
-              <a:buSzPct val="100000"/>
-              <a:buChar char="•"/>
-            </a:pPr>
-            <a:r>
-              <a:rPr lang="en-US" sz="1200" i="1" dirty="0">
-                <a:solidFill>
-                  <a:srgbClr val="1C2833"/>
-                </a:solidFill>
-                <a:latin typeface="Arial" pitchFamily="34" charset="0"/>
-                <a:ea typeface="Arial" pitchFamily="34" charset="-122"/>
-                <a:cs typeface="Arial" pitchFamily="34" charset="-120"/>
-              </a:rPr>
-              <a:t>Avabodha</a:t>
-            </a:r>
-            <a:pPr algn="l" indent="0" marL="0">
-              <a:lnSpc>
-                <a:spcPts val="1620"/>
-              </a:lnSpc>
-              <a:spcAft>
-                <a:spcPts val="300"/>
-              </a:spcAft>
-              <a:buNone/>
-            </a:pPr>
-            <a:r>
-              <a:rPr lang="en-US" sz="1200" dirty="0">
-                <a:solidFill>
-                  <a:srgbClr val="1C2833"/>
-                </a:solidFill>
-                <a:latin typeface="Arial" pitchFamily="34" charset="0"/>
-                <a:ea typeface="Arial" pitchFamily="34" charset="-122"/>
-                <a:cs typeface="Arial" pitchFamily="34" charset="-120"/>
-              </a:rPr>
-              <a:t> — waking</a:t>
-            </a:r>
-            <a:endParaRPr lang="en-US" sz="1200" dirty="0"/>
-          </a:p>
-        </p:txBody>
-      </p:sp>
-      <p:sp>
-        <p:nvSpPr>
-          <p:cNvPr id="6" name="Text 4"/>
-          <p:cNvSpPr/>
-          <p:nvPr/>
-        </p:nvSpPr>
-        <p:spPr>
-          <a:xfrm>
-            <a:off x="406301" y="2518916"/>
-            <a:ext cx="8498026" cy="213271"/>
-          </a:xfrm>
-          <a:prstGeom prst="rect">
-            <a:avLst/>
-          </a:prstGeom>
-          <a:noFill/>
-          <a:ln/>
-        </p:spPr>
-        <p:txBody>
-          <a:bodyPr wrap="square" lIns="0" tIns="0" rIns="0" bIns="0" rtlCol="0" anchor="t"/>
-          <a:lstStyle/>
-          <a:p>
-            <a:pPr algn="l" indent="0" marL="0">
-              <a:lnSpc>
-                <a:spcPts val="1680"/>
-              </a:lnSpc>
-              <a:spcBef>
-                <a:spcPts val="300"/>
-              </a:spcBef>
-              <a:spcAft>
-                <a:spcPts val="300"/>
-              </a:spcAft>
-              <a:buNone/>
-            </a:pPr>
-            <a:r>
-              <a:rPr lang="en-US" sz="1200" dirty="0">
-                <a:solidFill>
-                  <a:srgbClr val="1C2833"/>
-                </a:solidFill>
-                <a:latin typeface="Arial" pitchFamily="34" charset="0"/>
-                <a:ea typeface="Arial" pitchFamily="34" charset="-122"/>
-                <a:cs typeface="Arial" pitchFamily="34" charset="-120"/>
-              </a:rPr>
-              <a:t>Now connect to dinacharya:</a:t>
-            </a:r>
-            <a:endParaRPr lang="en-US" sz="1200" dirty="0"/>
-          </a:p>
-        </p:txBody>
-      </p:sp>
-      <p:sp>
-        <p:nvSpPr>
-          <p:cNvPr id="7" name="Text 5"/>
-          <p:cNvSpPr/>
-          <p:nvPr/>
-        </p:nvSpPr>
-        <p:spPr>
-          <a:xfrm>
-            <a:off x="634901" y="2821037"/>
-            <a:ext cx="8102798" cy="1257002"/>
-          </a:xfrm>
-          <a:prstGeom prst="rect">
-            <a:avLst/>
-          </a:prstGeom>
-          <a:noFill/>
-          <a:ln/>
-        </p:spPr>
-        <p:txBody>
-          <a:bodyPr wrap="square" lIns="0" tIns="0" rIns="0" bIns="0" rtlCol="0" anchor="t"/>
-          <a:lstStyle/>
-          <a:p>
-            <a:pPr algn="l" marL="342900" indent="-342900">
-              <a:lnSpc>
-                <a:spcPts val="1620"/>
-              </a:lnSpc>
-              <a:spcAft>
-                <a:spcPts val="300"/>
-              </a:spcAft>
-              <a:buSzPct val="100000"/>
-              <a:buChar char="•"/>
-            </a:pPr>
-            <a:r>
-              <a:rPr lang="en-US" sz="1200" i="1" dirty="0">
-                <a:solidFill>
-                  <a:srgbClr val="1C2833"/>
-                </a:solidFill>
-                <a:latin typeface="Arial" pitchFamily="34" charset="0"/>
-                <a:ea typeface="Arial" pitchFamily="34" charset="-122"/>
-                <a:cs typeface="Arial" pitchFamily="34" charset="-120"/>
-              </a:rPr>
-              <a:t>Āhāra</a:t>
-            </a:r>
-            <a:pPr algn="l" indent="0" marL="0">
-              <a:lnSpc>
-                <a:spcPts val="1620"/>
-              </a:lnSpc>
-              <a:spcAft>
-                <a:spcPts val="300"/>
-              </a:spcAft>
-              <a:buNone/>
-            </a:pPr>
-            <a:r>
-              <a:rPr lang="en-US" sz="1200" dirty="0">
-                <a:solidFill>
-                  <a:srgbClr val="1C2833"/>
-                </a:solidFill>
-                <a:latin typeface="Arial" pitchFamily="34" charset="0"/>
-                <a:ea typeface="Arial" pitchFamily="34" charset="-122"/>
-                <a:cs typeface="Arial" pitchFamily="34" charset="-120"/>
-              </a:rPr>
-              <a:t> → eating timing + six tastes (Day 6)</a:t>
-            </a:r>
-            <a:endParaRPr lang="en-US" sz="1200" dirty="0"/>
-          </a:p>
-          <a:p>
-            <a:pPr algn="l" marL="342900" indent="-342900">
-              <a:lnSpc>
-                <a:spcPts val="1620"/>
-              </a:lnSpc>
-              <a:spcAft>
-                <a:spcPts val="300"/>
-              </a:spcAft>
-              <a:buSzPct val="100000"/>
-              <a:buChar char="•"/>
-            </a:pPr>
-            <a:r>
-              <a:rPr lang="en-US" sz="1200" i="1" dirty="0">
-                <a:solidFill>
-                  <a:srgbClr val="1C2833"/>
-                </a:solidFill>
-                <a:latin typeface="Arial" pitchFamily="34" charset="0"/>
-                <a:ea typeface="Arial" pitchFamily="34" charset="-122"/>
-                <a:cs typeface="Arial" pitchFamily="34" charset="-120"/>
-              </a:rPr>
-              <a:t>Vihāra</a:t>
-            </a:r>
-            <a:pPr algn="l" indent="0" marL="0">
-              <a:lnSpc>
-                <a:spcPts val="1620"/>
-              </a:lnSpc>
-              <a:spcAft>
-                <a:spcPts val="300"/>
-              </a:spcAft>
-              <a:buNone/>
-            </a:pPr>
-            <a:r>
-              <a:rPr lang="en-US" sz="1200" dirty="0">
-                <a:solidFill>
-                  <a:srgbClr val="1C2833"/>
-                </a:solidFill>
-                <a:latin typeface="Arial" pitchFamily="34" charset="0"/>
-                <a:ea typeface="Arial" pitchFamily="34" charset="-122"/>
-                <a:cs typeface="Arial" pitchFamily="34" charset="-120"/>
-              </a:rPr>
-              <a:t> → exercise (vyāyāma) + leisure</a:t>
-            </a:r>
-            <a:endParaRPr lang="en-US" sz="1200" dirty="0"/>
-          </a:p>
-          <a:p>
-            <a:pPr algn="l" marL="342900" indent="-342900">
-              <a:lnSpc>
-                <a:spcPts val="1620"/>
-              </a:lnSpc>
-              <a:spcAft>
-                <a:spcPts val="300"/>
-              </a:spcAft>
-              <a:buSzPct val="100000"/>
-              <a:buChar char="•"/>
-            </a:pPr>
-            <a:r>
-              <a:rPr lang="en-US" sz="1200" i="1" dirty="0">
-                <a:solidFill>
-                  <a:srgbClr val="1C2833"/>
-                </a:solidFill>
-                <a:latin typeface="Arial" pitchFamily="34" charset="0"/>
-                <a:ea typeface="Arial" pitchFamily="34" charset="-122"/>
-                <a:cs typeface="Arial" pitchFamily="34" charset="-120"/>
-              </a:rPr>
-              <a:t>Ceṣṭā in karma</a:t>
-            </a:r>
-            <a:pPr algn="l" indent="0" marL="0">
-              <a:lnSpc>
-                <a:spcPts val="1620"/>
-              </a:lnSpc>
-              <a:spcAft>
-                <a:spcPts val="300"/>
-              </a:spcAft>
-              <a:buNone/>
-            </a:pPr>
-            <a:r>
-              <a:rPr lang="en-US" sz="1200" dirty="0">
-                <a:solidFill>
-                  <a:srgbClr val="1C2833"/>
-                </a:solidFill>
-                <a:latin typeface="Arial" pitchFamily="34" charset="0"/>
-                <a:ea typeface="Arial" pitchFamily="34" charset="-122"/>
-                <a:cs typeface="Arial" pitchFamily="34" charset="-120"/>
-              </a:rPr>
-              <a:t> → balanced effort, neither lazy nor over-exerted</a:t>
-            </a:r>
-            <a:endParaRPr lang="en-US" sz="1200" dirty="0"/>
-          </a:p>
-          <a:p>
-            <a:pPr algn="l" marL="342900" indent="-342900">
-              <a:lnSpc>
-                <a:spcPts val="1620"/>
-              </a:lnSpc>
-              <a:spcAft>
-                <a:spcPts val="300"/>
-              </a:spcAft>
-              <a:buSzPct val="100000"/>
-              <a:buChar char="•"/>
-            </a:pPr>
-            <a:r>
-              <a:rPr lang="en-US" sz="1200" i="1" dirty="0">
-                <a:solidFill>
-                  <a:srgbClr val="1C2833"/>
-                </a:solidFill>
-                <a:latin typeface="Arial" pitchFamily="34" charset="0"/>
-                <a:ea typeface="Arial" pitchFamily="34" charset="-122"/>
-                <a:cs typeface="Arial" pitchFamily="34" charset="-120"/>
-              </a:rPr>
-              <a:t>Svapna</a:t>
-            </a:r>
-            <a:pPr algn="l" indent="0" marL="0">
-              <a:lnSpc>
-                <a:spcPts val="1620"/>
-              </a:lnSpc>
-              <a:spcAft>
-                <a:spcPts val="300"/>
-              </a:spcAft>
-              <a:buNone/>
-            </a:pPr>
-            <a:r>
-              <a:rPr lang="en-US" sz="1200" dirty="0">
-                <a:solidFill>
-                  <a:srgbClr val="1C2833"/>
-                </a:solidFill>
-                <a:latin typeface="Arial" pitchFamily="34" charset="0"/>
-                <a:ea typeface="Arial" pitchFamily="34" charset="-122"/>
-                <a:cs typeface="Arial" pitchFamily="34" charset="-120"/>
-              </a:rPr>
-              <a:t> → sleep by 10pm</a:t>
-            </a:r>
-            <a:endParaRPr lang="en-US" sz="1200" dirty="0"/>
-          </a:p>
-          <a:p>
-            <a:pPr algn="l" marL="342900" indent="-342900">
-              <a:lnSpc>
-                <a:spcPts val="1620"/>
-              </a:lnSpc>
-              <a:spcAft>
-                <a:spcPts val="300"/>
-              </a:spcAft>
-              <a:buSzPct val="100000"/>
-              <a:buChar char="•"/>
-            </a:pPr>
-            <a:r>
-              <a:rPr lang="en-US" sz="1200" i="1" dirty="0">
-                <a:solidFill>
-                  <a:srgbClr val="1C2833"/>
-                </a:solidFill>
-                <a:latin typeface="Arial" pitchFamily="34" charset="0"/>
-                <a:ea typeface="Arial" pitchFamily="34" charset="-122"/>
-                <a:cs typeface="Arial" pitchFamily="34" charset="-120"/>
-              </a:rPr>
-              <a:t>Avabodha</a:t>
-            </a:r>
-            <a:pPr algn="l" indent="0" marL="0">
-              <a:lnSpc>
-                <a:spcPts val="1620"/>
-              </a:lnSpc>
-              <a:spcAft>
-                <a:spcPts val="300"/>
-              </a:spcAft>
-              <a:buNone/>
-            </a:pPr>
-            <a:r>
-              <a:rPr lang="en-US" sz="1200" dirty="0">
-                <a:solidFill>
-                  <a:srgbClr val="1C2833"/>
-                </a:solidFill>
-                <a:latin typeface="Arial" pitchFamily="34" charset="0"/>
-                <a:ea typeface="Arial" pitchFamily="34" charset="-122"/>
-                <a:cs typeface="Arial" pitchFamily="34" charset="-120"/>
-              </a:rPr>
-              <a:t> → waking before sunrise (brāhma muhūrta)</a:t>
-            </a:r>
-            <a:endParaRPr lang="en-US" sz="1200" dirty="0"/>
-          </a:p>
-        </p:txBody>
-      </p:sp>
-      <p:sp>
-        <p:nvSpPr>
-          <p:cNvPr id="8" name="Text 6"/>
-          <p:cNvSpPr/>
-          <p:nvPr/>
-        </p:nvSpPr>
-        <p:spPr>
-          <a:xfrm>
-            <a:off x="406301" y="4166890"/>
-            <a:ext cx="8498026" cy="426541"/>
-          </a:xfrm>
-          <a:prstGeom prst="rect">
-            <a:avLst/>
-          </a:prstGeom>
-          <a:noFill/>
-          <a:ln/>
-        </p:spPr>
-        <p:txBody>
-          <a:bodyPr wrap="square" lIns="0" tIns="0" rIns="0" bIns="0" rtlCol="0" anchor="t"/>
-          <a:lstStyle/>
-          <a:p>
-            <a:pPr algn="l" indent="0" marL="0">
-              <a:lnSpc>
-                <a:spcPts val="1680"/>
-              </a:lnSpc>
-              <a:spcBef>
-                <a:spcPts val="300"/>
-              </a:spcBef>
-              <a:spcAft>
-                <a:spcPts val="300"/>
-              </a:spcAft>
-              <a:buNone/>
-            </a:pPr>
-            <a:r>
-              <a:rPr lang="en-US" sz="1200" b="1" dirty="0">
-                <a:solidFill>
-                  <a:srgbClr val="1C2833"/>
-                </a:solidFill>
-                <a:latin typeface="Arial" pitchFamily="34" charset="0"/>
-                <a:ea typeface="Arial" pitchFamily="34" charset="-122"/>
-                <a:cs typeface="Arial" pitchFamily="34" charset="-120"/>
-              </a:rPr>
-              <a:t>Note:</a:t>
-            </a:r>
-            <a:pPr algn="l" indent="0" marL="0">
-              <a:lnSpc>
-                <a:spcPts val="1680"/>
-              </a:lnSpc>
-              <a:spcBef>
-                <a:spcPts val="300"/>
-              </a:spcBef>
-              <a:spcAft>
-                <a:spcPts val="300"/>
-              </a:spcAft>
-              <a:buNone/>
-            </a:pPr>
-            <a:r>
-              <a:rPr lang="en-US" sz="1200" dirty="0">
-                <a:solidFill>
-                  <a:srgbClr val="1C2833"/>
-                </a:solidFill>
-                <a:latin typeface="Arial" pitchFamily="34" charset="0"/>
-                <a:ea typeface="Arial" pitchFamily="34" charset="-122"/>
-                <a:cs typeface="Arial" pitchFamily="34" charset="-120"/>
-              </a:rPr>
-              <a:t> the verse is from the </a:t>
-            </a:r>
-            <a:pPr algn="l" indent="0" marL="0">
-              <a:lnSpc>
-                <a:spcPts val="1680"/>
-              </a:lnSpc>
-              <a:spcBef>
-                <a:spcPts val="300"/>
-              </a:spcBef>
-              <a:spcAft>
-                <a:spcPts val="300"/>
-              </a:spcAft>
-              <a:buNone/>
-            </a:pPr>
-            <a:r>
-              <a:rPr lang="en-US" sz="1200" i="1" dirty="0">
-                <a:solidFill>
-                  <a:srgbClr val="1C2833"/>
-                </a:solidFill>
-                <a:latin typeface="Arial" pitchFamily="34" charset="0"/>
-                <a:ea typeface="Arial" pitchFamily="34" charset="-122"/>
-                <a:cs typeface="Arial" pitchFamily="34" charset="-120"/>
-              </a:rPr>
-              <a:t>Bhagavad-gītā</a:t>
-            </a:r>
-            <a:pPr algn="l" indent="0" marL="0">
-              <a:lnSpc>
-                <a:spcPts val="1680"/>
-              </a:lnSpc>
-              <a:spcBef>
-                <a:spcPts val="300"/>
-              </a:spcBef>
-              <a:spcAft>
-                <a:spcPts val="300"/>
-              </a:spcAft>
-              <a:buNone/>
-            </a:pPr>
-            <a:r>
-              <a:rPr lang="en-US" sz="1200" dirty="0">
-                <a:solidFill>
-                  <a:srgbClr val="1C2833"/>
-                </a:solidFill>
-                <a:latin typeface="Arial" pitchFamily="34" charset="0"/>
-                <a:ea typeface="Arial" pitchFamily="34" charset="-122"/>
-                <a:cs typeface="Arial" pitchFamily="34" charset="-120"/>
-              </a:rPr>
-              <a:t>, a philosophical-spiritual text. It frames regulated living as the foundation for </a:t>
-            </a:r>
-            <a:pPr algn="l" indent="0" marL="0">
-              <a:lnSpc>
-                <a:spcPts val="1680"/>
-              </a:lnSpc>
-              <a:spcBef>
-                <a:spcPts val="300"/>
-              </a:spcBef>
-              <a:spcAft>
-                <a:spcPts val="300"/>
-              </a:spcAft>
-              <a:buNone/>
-            </a:pPr>
-            <a:r>
-              <a:rPr lang="en-US" sz="1200" i="1" dirty="0">
-                <a:solidFill>
-                  <a:srgbClr val="1C2833"/>
-                </a:solidFill>
-                <a:latin typeface="Arial" pitchFamily="34" charset="0"/>
-                <a:ea typeface="Arial" pitchFamily="34" charset="-122"/>
-                <a:cs typeface="Arial" pitchFamily="34" charset="-120"/>
-              </a:rPr>
-              <a:t>yoga</a:t>
-            </a:r>
-            <a:pPr algn="l" indent="0" marL="0">
-              <a:lnSpc>
-                <a:spcPts val="1680"/>
-              </a:lnSpc>
-              <a:spcBef>
-                <a:spcPts val="300"/>
-              </a:spcBef>
-              <a:spcAft>
-                <a:spcPts val="300"/>
-              </a:spcAft>
-              <a:buNone/>
-            </a:pPr>
-            <a:r>
-              <a:rPr lang="en-US" sz="1200" dirty="0">
-                <a:solidFill>
-                  <a:srgbClr val="1C2833"/>
-                </a:solidFill>
-                <a:latin typeface="Arial" pitchFamily="34" charset="0"/>
-                <a:ea typeface="Arial" pitchFamily="34" charset="-122"/>
-                <a:cs typeface="Arial" pitchFamily="34" charset="-120"/>
-              </a:rPr>
-              <a:t> (the discipline of mind). Ayurveda picks up this same framework on the body-health side.</a:t>
-            </a:r>
-            <a:endParaRPr lang="en-US" sz="1200" dirty="0"/>
-          </a:p>
-        </p:txBody>
-      </p:sp>
-      <p:sp>
-        <p:nvSpPr>
-          <p:cNvPr id="9" name="Text 7"/>
-          <p:cNvSpPr/>
-          <p:nvPr/>
-        </p:nvSpPr>
-        <p:spPr>
-          <a:xfrm>
-            <a:off x="406301" y="4745831"/>
+            <a:off x="406301" y="4434929"/>
             <a:ext cx="8498026" cy="213271"/>
           </a:xfrm>
           <a:prstGeom prst="rect">
@@ -4134,7 +5626,7 @@
                 <a:ea typeface="Georgia" pitchFamily="34" charset="-122"/>
                 <a:cs typeface="Georgia" pitchFamily="34" charset="-120"/>
               </a:rPr>
-              <a:t>Discussion (8 min)</a:t>
+              <a:t>Reading (20 min)</a:t>
             </a:r>
             <a:endParaRPr lang="en-US" sz="1800" dirty="0"/>
           </a:p>
@@ -4148,8 +5640,61 @@
         </p:nvSpPr>
         <p:spPr>
           <a:xfrm>
-            <a:off x="406301" y="870942"/>
-            <a:ext cx="8498026" cy="213271"/>
+            <a:off x="406301" y="883593"/>
+            <a:ext cx="8331398" cy="842963"/>
+          </a:xfrm>
+          <a:prstGeom prst="rect">
+            <a:avLst/>
+          </a:prstGeom>
+          <a:solidFill>
+            <a:srgbClr val="F4F8F9"/>
+          </a:solidFill>
+          <a:ln/>
+        </p:spPr>
+        <p:txBody>
+          <a:bodyPr wrap="square" rtlCol="0" anchor="ctr"/>
+          <a:lstStyle/>
+          <a:p>
+            <a:pPr indent="0" marL="0">
+              <a:buNone/>
+            </a:pPr>
+            <a:endParaRPr lang="en-US" dirty="0"/>
+          </a:p>
+        </p:txBody>
+      </p:sp>
+      <p:sp>
+        <p:nvSpPr>
+          <p:cNvPr id="5" name="Shape 3"/>
+          <p:cNvSpPr/>
+          <p:nvPr/>
+        </p:nvSpPr>
+        <p:spPr>
+          <a:xfrm>
+            <a:off x="434876" y="883593"/>
+            <a:ext cx="0" cy="842963"/>
+          </a:xfrm>
+          <a:prstGeom prst="line">
+            <a:avLst/>
+          </a:prstGeom>
+          <a:noFill/>
+          <a:ln w="57150">
+            <a:solidFill>
+              <a:srgbClr val="FE4447"/>
+            </a:solidFill>
+            <a:prstDash val="solid"/>
+          </a:ln>
+        </p:spPr>
+      </p:sp>
+      <p:sp>
+        <p:nvSpPr>
+          <p:cNvPr id="6" name="Text 4"/>
+          <p:cNvSpPr/>
+          <p:nvPr/>
+        </p:nvSpPr>
+        <p:spPr>
+          <a:xfrm>
+            <a:off x="692051" y="1074093"/>
+            <a:ext cx="7973389" cy="461963"/>
           </a:xfrm>
           <a:prstGeom prst="rect">
             <a:avLst/>
@@ -4163,6 +5708,123 @@
           <a:p>
             <a:pPr algn="l" indent="0" marL="0">
               <a:lnSpc>
+                <a:spcPts val="1820"/>
+              </a:lnSpc>
+              <a:spcBef>
+                <a:spcPts val="300"/>
+              </a:spcBef>
+              <a:spcAft>
+                <a:spcPts val="300"/>
+              </a:spcAft>
+              <a:buNone/>
+            </a:pPr>
+            <a:r>
+              <a:rPr lang="en-US" sz="1300" i="1" dirty="0">
+                <a:solidFill>
+                  <a:srgbClr val="1C2833"/>
+                </a:solidFill>
+                <a:latin typeface="Georgia" pitchFamily="34" charset="0"/>
+                <a:ea typeface="Georgia" pitchFamily="34" charset="-122"/>
+                <a:cs typeface="Georgia" pitchFamily="34" charset="-120"/>
+              </a:rPr>
+              <a:t>yuktāhāra-vihārasya yukta-ceṣṭasya karmasu</a:t>
+            </a:r>
+            <a:pPr algn="l" indent="0" marL="0">
+              <a:lnSpc>
+                <a:spcPts val="1820"/>
+              </a:lnSpc>
+              <a:spcBef>
+                <a:spcPts val="300"/>
+              </a:spcBef>
+              <a:spcAft>
+                <a:spcPts val="300"/>
+              </a:spcAft>
+              <a:buNone/>
+            </a:pPr>
+            <a:r>
+              <a:rPr lang="en-US" sz="1300" dirty="0">
+                <a:solidFill>
+                  <a:srgbClr val="1C2833"/>
+                </a:solidFill>
+                <a:latin typeface="Georgia" pitchFamily="34" charset="0"/>
+                <a:ea typeface="Georgia" pitchFamily="34" charset="-122"/>
+                <a:cs typeface="Georgia" pitchFamily="34" charset="-120"/>
+              </a:rPr>
+              <a:t> </a:t>
+            </a:r>
+            <a:pPr algn="l" indent="0" marL="0">
+              <a:lnSpc>
+                <a:spcPts val="1820"/>
+              </a:lnSpc>
+              <a:spcBef>
+                <a:spcPts val="300"/>
+              </a:spcBef>
+              <a:spcAft>
+                <a:spcPts val="300"/>
+              </a:spcAft>
+              <a:buNone/>
+            </a:pPr>
+            <a:r>
+              <a:rPr lang="en-US" sz="1300" i="1" dirty="0">
+                <a:solidFill>
+                  <a:srgbClr val="1C2833"/>
+                </a:solidFill>
+                <a:latin typeface="Georgia" pitchFamily="34" charset="0"/>
+                <a:ea typeface="Georgia" pitchFamily="34" charset="-122"/>
+                <a:cs typeface="Georgia" pitchFamily="34" charset="-120"/>
+              </a:rPr>
+              <a:t>yukta-svapnāvabodhasya yogo bhavati duḥkha-hā</a:t>
+            </a:r>
+            <a:pPr algn="l" indent="0" marL="0">
+              <a:lnSpc>
+                <a:spcPts val="1820"/>
+              </a:lnSpc>
+              <a:spcBef>
+                <a:spcPts val="300"/>
+              </a:spcBef>
+              <a:spcAft>
+                <a:spcPts val="300"/>
+              </a:spcAft>
+              <a:buNone/>
+            </a:pPr>
+            <a:r>
+              <a:rPr lang="en-US" sz="1300" dirty="0">
+                <a:solidFill>
+                  <a:srgbClr val="1C2833"/>
+                </a:solidFill>
+                <a:latin typeface="Georgia" pitchFamily="34" charset="0"/>
+                <a:ea typeface="Georgia" pitchFamily="34" charset="-122"/>
+                <a:cs typeface="Georgia" pitchFamily="34" charset="-120"/>
+              </a:rPr>
+              <a:t> — Bhagavad-gītā 6.17</a:t>
+            </a:r>
+            <a:endParaRPr lang="en-US" sz="1300" dirty="0"/>
+          </a:p>
+        </p:txBody>
+      </p:sp>
+      <p:sp>
+        <p:nvSpPr>
+          <p:cNvPr id="7" name="Text 5"/>
+          <p:cNvSpPr/>
+          <p:nvPr/>
+        </p:nvSpPr>
+        <p:spPr>
+          <a:xfrm>
+            <a:off x="406301" y="1815405"/>
+            <a:ext cx="8498026" cy="213271"/>
+          </a:xfrm>
+          <a:prstGeom prst="rect">
+            <a:avLst/>
+          </a:prstGeom>
+          <a:noFill/>
+          <a:ln/>
+        </p:spPr>
+        <p:txBody>
+          <a:bodyPr wrap="square" lIns="0" tIns="0" rIns="0" bIns="0" rtlCol="0" anchor="t"/>
+          <a:lstStyle/>
+          <a:p>
+            <a:pPr algn="l" indent="0" marL="0">
+              <a:lnSpc>
                 <a:spcPts val="1680"/>
               </a:lnSpc>
               <a:spcBef>
@@ -4174,16 +5836,41 @@
               <a:buNone/>
             </a:pPr>
             <a:r>
-              <a:rPr lang="en-US" sz="1200" dirty="0">
-                <a:solidFill>
-                  <a:srgbClr val="1C2833"/>
-                </a:solidFill>
-                <a:latin typeface="Arial" pitchFamily="34" charset="0"/>
-                <a:ea typeface="Arial" pitchFamily="34" charset="-122"/>
-                <a:cs typeface="Arial" pitchFamily="34" charset="-120"/>
-              </a:rPr>
-              <a:t>– Question: </a:t>
-            </a:r>
+              <a:rPr lang="en-US" sz="1200" b="1" dirty="0">
+                <a:solidFill>
+                  <a:srgbClr val="1C2833"/>
+                </a:solidFill>
+                <a:latin typeface="Arial" pitchFamily="34" charset="0"/>
+                <a:ea typeface="Arial" pitchFamily="34" charset="-122"/>
+                <a:cs typeface="Arial" pitchFamily="34" charset="-120"/>
+              </a:rPr>
+              <a:t>Word-by-word:</a:t>
+            </a:r>
+            <a:endParaRPr lang="en-US" sz="1200" dirty="0"/>
+          </a:p>
+        </p:txBody>
+      </p:sp>
+      <p:sp>
+        <p:nvSpPr>
+          <p:cNvPr id="8" name="Text 6"/>
+          <p:cNvSpPr/>
+          <p:nvPr/>
+        </p:nvSpPr>
+        <p:spPr>
+          <a:xfrm>
+            <a:off x="406301" y="2104876"/>
+            <a:ext cx="8498026" cy="213271"/>
+          </a:xfrm>
+          <a:prstGeom prst="rect">
+            <a:avLst/>
+          </a:prstGeom>
+          <a:noFill/>
+          <a:ln/>
+        </p:spPr>
+        <p:txBody>
+          <a:bodyPr wrap="square" lIns="0" tIns="0" rIns="0" bIns="0" rtlCol="0" anchor="t"/>
+          <a:lstStyle/>
+          <a:p>
             <a:pPr algn="l" indent="0" marL="0">
               <a:lnSpc>
                 <a:spcPts val="1680"/>
@@ -4205,30 +5892,7 @@
                 <a:ea typeface="Arial" pitchFamily="34" charset="-122"/>
                 <a:cs typeface="Arial" pitchFamily="34" charset="-120"/>
               </a:rPr>
-              <a:t>"Which of the five activities do you find HARDEST to regulate in your own life?"</a:t>
-            </a:r>
-            <a:pPr algn="l" indent="0" marL="0">
-              <a:lnSpc>
-                <a:spcPts val="1680"/>
-              </a:lnSpc>
-              <a:spcBef>
-                <a:spcPts val="300"/>
-              </a:spcBef>
-              <a:spcAft>
-                <a:spcPts val="300"/>
-              </a:spcAft>
-              <a:buNone/>
-            </a:pPr>
-            <a:r>
-              <a:rPr lang="en-US" sz="1200" dirty="0">
-                <a:solidFill>
-                  <a:srgbClr val="1C2833"/>
-                </a:solidFill>
-                <a:latin typeface="Arial" pitchFamily="34" charset="0"/>
-                <a:ea typeface="Arial" pitchFamily="34" charset="-122"/>
-                <a:cs typeface="Arial" pitchFamily="34" charset="-120"/>
-              </a:rPr>
-              <a:t> – Take 4 student answers.</a:t>
+              <a:t>Each row: Sanskrit · Gloss.</a:t>
             </a:r>
             <a:endParaRPr lang="en-US" sz="1200" dirty="0"/>
           </a:p>
@@ -4236,7 +5900,7 @@
       </p:sp>
       <p:sp>
         <p:nvSpPr>
-          <p:cNvPr id="5" name="Text 3"/>
+          <p:cNvPr id="9" name="Text 7"/>
           <p:cNvSpPr/>
           <p:nvPr/>
         </p:nvSpPr>
@@ -4386,7 +6050,7 @@
                 <a:ea typeface="Georgia" pitchFamily="34" charset="-122"/>
                 <a:cs typeface="Georgia" pitchFamily="34" charset="-120"/>
               </a:rPr>
-              <a:t>Wrap-up (2 min)</a:t>
+              <a:t>Reading (20 min) (cont.)</a:t>
             </a:r>
             <a:endParaRPr lang="en-US" sz="1800" dirty="0"/>
           </a:p>
@@ -4400,8 +6064,8 @@
         </p:nvSpPr>
         <p:spPr>
           <a:xfrm>
-            <a:off x="406301" y="870942"/>
-            <a:ext cx="8498026" cy="213271"/>
+            <a:off x="634901" y="883593"/>
+            <a:ext cx="8102798" cy="2475905"/>
           </a:xfrm>
           <a:prstGeom prst="rect">
             <a:avLst/>
@@ -4413,13 +6077,31 @@
           <a:bodyPr wrap="square" lIns="0" tIns="0" rIns="0" bIns="0" rtlCol="0" anchor="t"/>
           <a:lstStyle/>
           <a:p>
-            <a:pPr algn="l" indent="0" marL="0">
-              <a:lnSpc>
-                <a:spcPts val="1680"/>
-              </a:lnSpc>
-              <a:spcBef>
-                <a:spcPts val="300"/>
-              </a:spcBef>
+            <a:pPr algn="l" marL="342900" indent="-342900">
+              <a:lnSpc>
+                <a:spcPts val="1620"/>
+              </a:lnSpc>
+              <a:spcAft>
+                <a:spcPts val="300"/>
+              </a:spcAft>
+              <a:buSzPct val="100000"/>
+              <a:buChar char="•"/>
+            </a:pPr>
+            <a:r>
+              <a:rPr lang="en-US" sz="1200" b="1" dirty="0">
+                <a:solidFill>
+                  <a:srgbClr val="1C2833"/>
+                </a:solidFill>
+                <a:latin typeface="Arial" pitchFamily="34" charset="0"/>
+                <a:ea typeface="Arial" pitchFamily="34" charset="-122"/>
+                <a:cs typeface="Arial" pitchFamily="34" charset="-120"/>
+              </a:rPr>
+              <a:t>yukta</a:t>
+            </a:r>
+            <a:pPr algn="l" indent="0" marL="0">
+              <a:lnSpc>
+                <a:spcPts val="1620"/>
+              </a:lnSpc>
               <a:spcAft>
                 <a:spcPts val="300"/>
               </a:spcAft>
@@ -4434,30 +6116,403 @@
                 <a:ea typeface="Arial" pitchFamily="34" charset="-122"/>
                 <a:cs typeface="Arial" pitchFamily="34" charset="-120"/>
               </a:rPr>
-              <a:t>– Preview Day 8: </a:t>
-            </a:r>
-            <a:pPr algn="l" indent="0" marL="0">
-              <a:lnSpc>
-                <a:spcPts val="1680"/>
-              </a:lnSpc>
-              <a:spcBef>
-                <a:spcPts val="300"/>
-              </a:spcBef>
-              <a:spcAft>
-                <a:spcPts val="300"/>
-              </a:spcAft>
-              <a:buNone/>
-            </a:pPr>
-            <a:r>
-              <a:rPr lang="en-US" sz="1200" i="1" dirty="0">
-                <a:solidFill>
-                  <a:srgbClr val="1C2833"/>
-                </a:solidFill>
-                <a:latin typeface="Arial" pitchFamily="34" charset="0"/>
-                <a:ea typeface="Arial" pitchFamily="34" charset="-122"/>
-                <a:cs typeface="Arial" pitchFamily="34" charset="-120"/>
-              </a:rPr>
-              <a:t>"Tomorrow — start designing your own 7-day dinacharya."</a:t>
+              <a:t> — regulated, balanced, joined</a:t>
+            </a:r>
+            <a:endParaRPr lang="en-US" sz="1200" dirty="0"/>
+          </a:p>
+          <a:p>
+            <a:pPr algn="l" marL="342900" indent="-342900">
+              <a:lnSpc>
+                <a:spcPts val="1620"/>
+              </a:lnSpc>
+              <a:spcAft>
+                <a:spcPts val="300"/>
+              </a:spcAft>
+              <a:buSzPct val="100000"/>
+              <a:buChar char="•"/>
+            </a:pPr>
+            <a:r>
+              <a:rPr lang="en-US" sz="1200" b="1" dirty="0">
+                <a:solidFill>
+                  <a:srgbClr val="1C2833"/>
+                </a:solidFill>
+                <a:latin typeface="Arial" pitchFamily="34" charset="0"/>
+                <a:ea typeface="Arial" pitchFamily="34" charset="-122"/>
+                <a:cs typeface="Arial" pitchFamily="34" charset="-120"/>
+              </a:rPr>
+              <a:t>āhāra</a:t>
+            </a:r>
+            <a:pPr algn="l" indent="0" marL="0">
+              <a:lnSpc>
+                <a:spcPts val="1620"/>
+              </a:lnSpc>
+              <a:spcAft>
+                <a:spcPts val="300"/>
+              </a:spcAft>
+              <a:buNone/>
+            </a:pPr>
+            <a:r>
+              <a:rPr lang="en-US" sz="1200" dirty="0">
+                <a:solidFill>
+                  <a:srgbClr val="1C2833"/>
+                </a:solidFill>
+                <a:latin typeface="Arial" pitchFamily="34" charset="0"/>
+                <a:ea typeface="Arial" pitchFamily="34" charset="-122"/>
+                <a:cs typeface="Arial" pitchFamily="34" charset="-120"/>
+              </a:rPr>
+              <a:t> — food</a:t>
+            </a:r>
+            <a:endParaRPr lang="en-US" sz="1200" dirty="0"/>
+          </a:p>
+          <a:p>
+            <a:pPr algn="l" marL="342900" indent="-342900">
+              <a:lnSpc>
+                <a:spcPts val="1620"/>
+              </a:lnSpc>
+              <a:spcAft>
+                <a:spcPts val="300"/>
+              </a:spcAft>
+              <a:buSzPct val="100000"/>
+              <a:buChar char="•"/>
+            </a:pPr>
+            <a:r>
+              <a:rPr lang="en-US" sz="1200" b="1" dirty="0">
+                <a:solidFill>
+                  <a:srgbClr val="1C2833"/>
+                </a:solidFill>
+                <a:latin typeface="Arial" pitchFamily="34" charset="0"/>
+                <a:ea typeface="Arial" pitchFamily="34" charset="-122"/>
+                <a:cs typeface="Arial" pitchFamily="34" charset="-120"/>
+              </a:rPr>
+              <a:t>vihārasya</a:t>
+            </a:r>
+            <a:pPr algn="l" indent="0" marL="0">
+              <a:lnSpc>
+                <a:spcPts val="1620"/>
+              </a:lnSpc>
+              <a:spcAft>
+                <a:spcPts val="300"/>
+              </a:spcAft>
+              <a:buNone/>
+            </a:pPr>
+            <a:r>
+              <a:rPr lang="en-US" sz="1200" dirty="0">
+                <a:solidFill>
+                  <a:srgbClr val="1C2833"/>
+                </a:solidFill>
+                <a:latin typeface="Arial" pitchFamily="34" charset="0"/>
+                <a:ea typeface="Arial" pitchFamily="34" charset="-122"/>
+                <a:cs typeface="Arial" pitchFamily="34" charset="-120"/>
+              </a:rPr>
+              <a:t> — of recreation, lifestyle (gen.)</a:t>
+            </a:r>
+            <a:endParaRPr lang="en-US" sz="1200" dirty="0"/>
+          </a:p>
+          <a:p>
+            <a:pPr algn="l" marL="342900" indent="-342900">
+              <a:lnSpc>
+                <a:spcPts val="1620"/>
+              </a:lnSpc>
+              <a:spcAft>
+                <a:spcPts val="300"/>
+              </a:spcAft>
+              <a:buSzPct val="100000"/>
+              <a:buChar char="•"/>
+            </a:pPr>
+            <a:r>
+              <a:rPr lang="en-US" sz="1200" b="1" dirty="0">
+                <a:solidFill>
+                  <a:srgbClr val="1C2833"/>
+                </a:solidFill>
+                <a:latin typeface="Arial" pitchFamily="34" charset="0"/>
+                <a:ea typeface="Arial" pitchFamily="34" charset="-122"/>
+                <a:cs typeface="Arial" pitchFamily="34" charset="-120"/>
+              </a:rPr>
+              <a:t>yukta-ceṣṭasya</a:t>
+            </a:r>
+            <a:pPr algn="l" indent="0" marL="0">
+              <a:lnSpc>
+                <a:spcPts val="1620"/>
+              </a:lnSpc>
+              <a:spcAft>
+                <a:spcPts val="300"/>
+              </a:spcAft>
+              <a:buNone/>
+            </a:pPr>
+            <a:r>
+              <a:rPr lang="en-US" sz="1200" dirty="0">
+                <a:solidFill>
+                  <a:srgbClr val="1C2833"/>
+                </a:solidFill>
+                <a:latin typeface="Arial" pitchFamily="34" charset="0"/>
+                <a:ea typeface="Arial" pitchFamily="34" charset="-122"/>
+                <a:cs typeface="Arial" pitchFamily="34" charset="-120"/>
+              </a:rPr>
+              <a:t> — of regulated effort/activity (gen.)</a:t>
+            </a:r>
+            <a:endParaRPr lang="en-US" sz="1200" dirty="0"/>
+          </a:p>
+          <a:p>
+            <a:pPr algn="l" marL="342900" indent="-342900">
+              <a:lnSpc>
+                <a:spcPts val="1620"/>
+              </a:lnSpc>
+              <a:spcAft>
+                <a:spcPts val="300"/>
+              </a:spcAft>
+              <a:buSzPct val="100000"/>
+              <a:buChar char="•"/>
+            </a:pPr>
+            <a:r>
+              <a:rPr lang="en-US" sz="1200" b="1" dirty="0">
+                <a:solidFill>
+                  <a:srgbClr val="1C2833"/>
+                </a:solidFill>
+                <a:latin typeface="Arial" pitchFamily="34" charset="0"/>
+                <a:ea typeface="Arial" pitchFamily="34" charset="-122"/>
+                <a:cs typeface="Arial" pitchFamily="34" charset="-120"/>
+              </a:rPr>
+              <a:t>karmasu</a:t>
+            </a:r>
+            <a:pPr algn="l" indent="0" marL="0">
+              <a:lnSpc>
+                <a:spcPts val="1620"/>
+              </a:lnSpc>
+              <a:spcAft>
+                <a:spcPts val="300"/>
+              </a:spcAft>
+              <a:buNone/>
+            </a:pPr>
+            <a:r>
+              <a:rPr lang="en-US" sz="1200" dirty="0">
+                <a:solidFill>
+                  <a:srgbClr val="1C2833"/>
+                </a:solidFill>
+                <a:latin typeface="Arial" pitchFamily="34" charset="0"/>
+                <a:ea typeface="Arial" pitchFamily="34" charset="-122"/>
+                <a:cs typeface="Arial" pitchFamily="34" charset="-120"/>
+              </a:rPr>
+              <a:t> — in work, actions (loc.)</a:t>
+            </a:r>
+            <a:endParaRPr lang="en-US" sz="1200" dirty="0"/>
+          </a:p>
+          <a:p>
+            <a:pPr algn="l" marL="342900" indent="-342900">
+              <a:lnSpc>
+                <a:spcPts val="1620"/>
+              </a:lnSpc>
+              <a:spcAft>
+                <a:spcPts val="300"/>
+              </a:spcAft>
+              <a:buSzPct val="100000"/>
+              <a:buChar char="•"/>
+            </a:pPr>
+            <a:r>
+              <a:rPr lang="en-US" sz="1200" b="1" dirty="0">
+                <a:solidFill>
+                  <a:srgbClr val="1C2833"/>
+                </a:solidFill>
+                <a:latin typeface="Arial" pitchFamily="34" charset="0"/>
+                <a:ea typeface="Arial" pitchFamily="34" charset="-122"/>
+                <a:cs typeface="Arial" pitchFamily="34" charset="-120"/>
+              </a:rPr>
+              <a:t>yukta-svapna</a:t>
+            </a:r>
+            <a:pPr algn="l" indent="0" marL="0">
+              <a:lnSpc>
+                <a:spcPts val="1620"/>
+              </a:lnSpc>
+              <a:spcAft>
+                <a:spcPts val="300"/>
+              </a:spcAft>
+              <a:buNone/>
+            </a:pPr>
+            <a:r>
+              <a:rPr lang="en-US" sz="1200" dirty="0">
+                <a:solidFill>
+                  <a:srgbClr val="1C2833"/>
+                </a:solidFill>
+                <a:latin typeface="Arial" pitchFamily="34" charset="0"/>
+                <a:ea typeface="Arial" pitchFamily="34" charset="-122"/>
+                <a:cs typeface="Arial" pitchFamily="34" charset="-120"/>
+              </a:rPr>
+              <a:t> — regulated sleep</a:t>
+            </a:r>
+            <a:endParaRPr lang="en-US" sz="1200" dirty="0"/>
+          </a:p>
+          <a:p>
+            <a:pPr algn="l" marL="342900" indent="-342900">
+              <a:lnSpc>
+                <a:spcPts val="1620"/>
+              </a:lnSpc>
+              <a:spcAft>
+                <a:spcPts val="300"/>
+              </a:spcAft>
+              <a:buSzPct val="100000"/>
+              <a:buChar char="•"/>
+            </a:pPr>
+            <a:r>
+              <a:rPr lang="en-US" sz="1200" b="1" dirty="0">
+                <a:solidFill>
+                  <a:srgbClr val="1C2833"/>
+                </a:solidFill>
+                <a:latin typeface="Arial" pitchFamily="34" charset="0"/>
+                <a:ea typeface="Arial" pitchFamily="34" charset="-122"/>
+                <a:cs typeface="Arial" pitchFamily="34" charset="-120"/>
+              </a:rPr>
+              <a:t>avabodhasya</a:t>
+            </a:r>
+            <a:pPr algn="l" indent="0" marL="0">
+              <a:lnSpc>
+                <a:spcPts val="1620"/>
+              </a:lnSpc>
+              <a:spcAft>
+                <a:spcPts val="300"/>
+              </a:spcAft>
+              <a:buNone/>
+            </a:pPr>
+            <a:r>
+              <a:rPr lang="en-US" sz="1200" dirty="0">
+                <a:solidFill>
+                  <a:srgbClr val="1C2833"/>
+                </a:solidFill>
+                <a:latin typeface="Arial" pitchFamily="34" charset="0"/>
+                <a:ea typeface="Arial" pitchFamily="34" charset="-122"/>
+                <a:cs typeface="Arial" pitchFamily="34" charset="-120"/>
+              </a:rPr>
+              <a:t> — of waking (gen.)</a:t>
+            </a:r>
+            <a:endParaRPr lang="en-US" sz="1200" dirty="0"/>
+          </a:p>
+          <a:p>
+            <a:pPr algn="l" marL="342900" indent="-342900">
+              <a:lnSpc>
+                <a:spcPts val="1620"/>
+              </a:lnSpc>
+              <a:spcAft>
+                <a:spcPts val="300"/>
+              </a:spcAft>
+              <a:buSzPct val="100000"/>
+              <a:buChar char="•"/>
+            </a:pPr>
+            <a:r>
+              <a:rPr lang="en-US" sz="1200" b="1" dirty="0">
+                <a:solidFill>
+                  <a:srgbClr val="1C2833"/>
+                </a:solidFill>
+                <a:latin typeface="Arial" pitchFamily="34" charset="0"/>
+                <a:ea typeface="Arial" pitchFamily="34" charset="-122"/>
+                <a:cs typeface="Arial" pitchFamily="34" charset="-120"/>
+              </a:rPr>
+              <a:t>yogo</a:t>
+            </a:r>
+            <a:pPr algn="l" indent="0" marL="0">
+              <a:lnSpc>
+                <a:spcPts val="1620"/>
+              </a:lnSpc>
+              <a:spcAft>
+                <a:spcPts val="300"/>
+              </a:spcAft>
+              <a:buNone/>
+            </a:pPr>
+            <a:r>
+              <a:rPr lang="en-US" sz="1200" dirty="0">
+                <a:solidFill>
+                  <a:srgbClr val="1C2833"/>
+                </a:solidFill>
+                <a:latin typeface="Arial" pitchFamily="34" charset="0"/>
+                <a:ea typeface="Arial" pitchFamily="34" charset="-122"/>
+                <a:cs typeface="Arial" pitchFamily="34" charset="-120"/>
+              </a:rPr>
+              <a:t> — yoga, discipline</a:t>
+            </a:r>
+            <a:endParaRPr lang="en-US" sz="1200" dirty="0"/>
+          </a:p>
+          <a:p>
+            <a:pPr algn="l" marL="342900" indent="-342900">
+              <a:lnSpc>
+                <a:spcPts val="1620"/>
+              </a:lnSpc>
+              <a:spcAft>
+                <a:spcPts val="300"/>
+              </a:spcAft>
+              <a:buSzPct val="100000"/>
+              <a:buChar char="•"/>
+            </a:pPr>
+            <a:r>
+              <a:rPr lang="en-US" sz="1200" b="1" dirty="0">
+                <a:solidFill>
+                  <a:srgbClr val="1C2833"/>
+                </a:solidFill>
+                <a:latin typeface="Arial" pitchFamily="34" charset="0"/>
+                <a:ea typeface="Arial" pitchFamily="34" charset="-122"/>
+                <a:cs typeface="Arial" pitchFamily="34" charset="-120"/>
+              </a:rPr>
+              <a:t>bhavati</a:t>
+            </a:r>
+            <a:pPr algn="l" indent="0" marL="0">
+              <a:lnSpc>
+                <a:spcPts val="1620"/>
+              </a:lnSpc>
+              <a:spcAft>
+                <a:spcPts val="300"/>
+              </a:spcAft>
+              <a:buNone/>
+            </a:pPr>
+            <a:r>
+              <a:rPr lang="en-US" sz="1200" dirty="0">
+                <a:solidFill>
+                  <a:srgbClr val="1C2833"/>
+                </a:solidFill>
+                <a:latin typeface="Arial" pitchFamily="34" charset="0"/>
+                <a:ea typeface="Arial" pitchFamily="34" charset="-122"/>
+                <a:cs typeface="Arial" pitchFamily="34" charset="-120"/>
+              </a:rPr>
+              <a:t> — becomes</a:t>
+            </a:r>
+            <a:endParaRPr lang="en-US" sz="1200" dirty="0"/>
+          </a:p>
+          <a:p>
+            <a:pPr algn="l" marL="342900" indent="-342900">
+              <a:lnSpc>
+                <a:spcPts val="1620"/>
+              </a:lnSpc>
+              <a:spcAft>
+                <a:spcPts val="300"/>
+              </a:spcAft>
+              <a:buSzPct val="100000"/>
+              <a:buChar char="•"/>
+            </a:pPr>
+            <a:r>
+              <a:rPr lang="en-US" sz="1200" b="1" dirty="0">
+                <a:solidFill>
+                  <a:srgbClr val="1C2833"/>
+                </a:solidFill>
+                <a:latin typeface="Arial" pitchFamily="34" charset="0"/>
+                <a:ea typeface="Arial" pitchFamily="34" charset="-122"/>
+                <a:cs typeface="Arial" pitchFamily="34" charset="-120"/>
+              </a:rPr>
+              <a:t>duḥkha-hā</a:t>
+            </a:r>
+            <a:pPr algn="l" indent="0" marL="0">
+              <a:lnSpc>
+                <a:spcPts val="1620"/>
+              </a:lnSpc>
+              <a:spcAft>
+                <a:spcPts val="300"/>
+              </a:spcAft>
+              <a:buNone/>
+            </a:pPr>
+            <a:r>
+              <a:rPr lang="en-US" sz="1200" dirty="0">
+                <a:solidFill>
+                  <a:srgbClr val="1C2833"/>
+                </a:solidFill>
+                <a:latin typeface="Arial" pitchFamily="34" charset="0"/>
+                <a:ea typeface="Arial" pitchFamily="34" charset="-122"/>
+                <a:cs typeface="Arial" pitchFamily="34" charset="-120"/>
+              </a:rPr>
+              <a:t> — sorrow-destroying</a:t>
             </a:r>
             <a:endParaRPr lang="en-US" sz="1200" dirty="0"/>
           </a:p>
@@ -4615,7 +6670,7 @@
                 <a:ea typeface="Georgia" pitchFamily="34" charset="-122"/>
                 <a:cs typeface="Georgia" pitchFamily="34" charset="-120"/>
               </a:rPr>
-              <a:t>Homework</a:t>
+              <a:t>Reading (20 min) (cont.)</a:t>
             </a:r>
             <a:endParaRPr lang="en-US" sz="1800" dirty="0"/>
           </a:p>
@@ -4655,15 +6710,15 @@
               <a:buNone/>
             </a:pPr>
             <a:r>
-              <a:rPr lang="en-US" sz="1200" dirty="0">
-                <a:solidFill>
-                  <a:srgbClr val="1C2833"/>
-                </a:solidFill>
-                <a:latin typeface="Arial" pitchFamily="34" charset="0"/>
-                <a:ea typeface="Arial" pitchFamily="34" charset="-122"/>
-                <a:cs typeface="Arial" pitchFamily="34" charset="-120"/>
-              </a:rPr>
-              <a:t>– Pick ONE of the five activities. Notice it tomorrow. Are you "yukta" (regulated) or out of balance?</a:t>
+              <a:rPr lang="en-US" sz="1200" b="1" dirty="0">
+                <a:solidFill>
+                  <a:srgbClr val="1C2833"/>
+                </a:solidFill>
+                <a:latin typeface="Arial" pitchFamily="34" charset="0"/>
+                <a:ea typeface="Arial" pitchFamily="34" charset="-122"/>
+                <a:cs typeface="Arial" pitchFamily="34" charset="-120"/>
+              </a:rPr>
+              <a:t>Continuous translation:</a:t>
             </a:r>
             <a:endParaRPr lang="en-US" sz="1200" dirty="0"/>
           </a:p>
@@ -4672,6 +6727,107 @@
       <p:sp>
         <p:nvSpPr>
           <p:cNvPr id="5" name="Text 3"/>
+          <p:cNvSpPr/>
+          <p:nvPr/>
+        </p:nvSpPr>
+        <p:spPr>
+          <a:xfrm>
+            <a:off x="406301" y="1173063"/>
+            <a:ext cx="8331398" cy="842963"/>
+          </a:xfrm>
+          <a:prstGeom prst="rect">
+            <a:avLst/>
+          </a:prstGeom>
+          <a:solidFill>
+            <a:srgbClr val="F4F8F9"/>
+          </a:solidFill>
+          <a:ln/>
+        </p:spPr>
+        <p:txBody>
+          <a:bodyPr wrap="square" rtlCol="0" anchor="ctr"/>
+          <a:lstStyle/>
+          <a:p>
+            <a:pPr indent="0" marL="0">
+              <a:buNone/>
+            </a:pPr>
+            <a:endParaRPr lang="en-US" dirty="0"/>
+          </a:p>
+        </p:txBody>
+      </p:sp>
+      <p:sp>
+        <p:nvSpPr>
+          <p:cNvPr id="6" name="Shape 4"/>
+          <p:cNvSpPr/>
+          <p:nvPr/>
+        </p:nvSpPr>
+        <p:spPr>
+          <a:xfrm>
+            <a:off x="434876" y="1173063"/>
+            <a:ext cx="0" cy="842963"/>
+          </a:xfrm>
+          <a:prstGeom prst="line">
+            <a:avLst/>
+          </a:prstGeom>
+          <a:noFill/>
+          <a:ln w="57150">
+            <a:solidFill>
+              <a:srgbClr val="FE4447"/>
+            </a:solidFill>
+            <a:prstDash val="solid"/>
+          </a:ln>
+        </p:spPr>
+      </p:sp>
+      <p:sp>
+        <p:nvSpPr>
+          <p:cNvPr id="7" name="Text 5"/>
+          <p:cNvSpPr/>
+          <p:nvPr/>
+        </p:nvSpPr>
+        <p:spPr>
+          <a:xfrm>
+            <a:off x="692051" y="1363563"/>
+            <a:ext cx="7973389" cy="461963"/>
+          </a:xfrm>
+          <a:prstGeom prst="rect">
+            <a:avLst/>
+          </a:prstGeom>
+          <a:noFill/>
+          <a:ln/>
+        </p:spPr>
+        <p:txBody>
+          <a:bodyPr wrap="square" lIns="0" tIns="0" rIns="0" bIns="0" rtlCol="0" anchor="t"/>
+          <a:lstStyle/>
+          <a:p>
+            <a:pPr algn="l" indent="0" marL="0">
+              <a:lnSpc>
+                <a:spcPts val="1820"/>
+              </a:lnSpc>
+              <a:spcBef>
+                <a:spcPts val="300"/>
+              </a:spcBef>
+              <a:spcAft>
+                <a:spcPts val="300"/>
+              </a:spcAft>
+              <a:buNone/>
+            </a:pPr>
+            <a:r>
+              <a:rPr lang="en-US" sz="1300" i="1" dirty="0">
+                <a:solidFill>
+                  <a:srgbClr val="1C2833"/>
+                </a:solidFill>
+                <a:latin typeface="Georgia" pitchFamily="34" charset="0"/>
+                <a:ea typeface="Georgia" pitchFamily="34" charset="-122"/>
+                <a:cs typeface="Georgia" pitchFamily="34" charset="-120"/>
+              </a:rPr>
+              <a:t>"He who is regulated in eating and recreation, in his effort in work, in his sleep and waking — for him, yoga becomes the destroyer of sorrow."</a:t>
+            </a:r>
+            <a:endParaRPr lang="en-US" sz="1300" dirty="0"/>
+          </a:p>
+        </p:txBody>
+      </p:sp>
+      <p:sp>
+        <p:nvSpPr>
+          <p:cNvPr id="8" name="Text 6"/>
           <p:cNvSpPr/>
           <p:nvPr/>
         </p:nvSpPr>
@@ -4821,7 +6977,7 @@
                 <a:ea typeface="Georgia" pitchFamily="34" charset="-122"/>
                 <a:cs typeface="Georgia" pitchFamily="34" charset="-120"/>
               </a:rPr>
-              <a:t>Differentiation</a:t>
+              <a:t>The five activities (10 min)</a:t>
             </a:r>
             <a:endParaRPr lang="en-US" sz="1800" dirty="0"/>
           </a:p>
@@ -4835,8 +6991,8 @@
         </p:nvSpPr>
         <p:spPr>
           <a:xfrm>
-            <a:off x="634901" y="883593"/>
-            <a:ext cx="8102798" cy="525661"/>
+            <a:off x="406301" y="870942"/>
+            <a:ext cx="8498026" cy="213271"/>
           </a:xfrm>
           <a:prstGeom prst="rect">
             <a:avLst/>
@@ -4848,6 +7004,54 @@
           <a:bodyPr wrap="square" lIns="0" tIns="0" rIns="0" bIns="0" rtlCol="0" anchor="t"/>
           <a:lstStyle/>
           <a:p>
+            <a:pPr algn="l" indent="0" marL="0">
+              <a:lnSpc>
+                <a:spcPts val="1680"/>
+              </a:lnSpc>
+              <a:spcBef>
+                <a:spcPts val="300"/>
+              </a:spcBef>
+              <a:spcAft>
+                <a:spcPts val="300"/>
+              </a:spcAft>
+              <a:buNone/>
+            </a:pPr>
+            <a:r>
+              <a:rPr lang="en-US" sz="1200" dirty="0">
+                <a:solidFill>
+                  <a:srgbClr val="1C2833"/>
+                </a:solidFill>
+                <a:latin typeface="Arial" pitchFamily="34" charset="0"/>
+                <a:ea typeface="Arial" pitchFamily="34" charset="-122"/>
+                <a:cs typeface="Arial" pitchFamily="34" charset="-120"/>
+              </a:rPr>
+              <a:t>Krishna names FIVE activities that need regulation:</a:t>
+            </a:r>
+            <a:endParaRPr lang="en-US" sz="1200" dirty="0"/>
+          </a:p>
+        </p:txBody>
+      </p:sp>
+      <p:sp>
+        <p:nvSpPr>
+          <p:cNvPr id="5" name="Text 3"/>
+          <p:cNvSpPr/>
+          <p:nvPr/>
+        </p:nvSpPr>
+        <p:spPr>
+          <a:xfrm>
+            <a:off x="634901" y="1173063"/>
+            <a:ext cx="8102798" cy="1257002"/>
+          </a:xfrm>
+          <a:prstGeom prst="rect">
+            <a:avLst/>
+          </a:prstGeom>
+          <a:noFill/>
+          <a:ln/>
+        </p:spPr>
+        <p:txBody>
+          <a:bodyPr wrap="square" lIns="0" tIns="0" rIns="0" bIns="0" rtlCol="0" anchor="t"/>
+          <a:lstStyle/>
+          <a:p>
             <a:pPr algn="l" marL="342900" indent="-342900">
               <a:lnSpc>
                 <a:spcPts val="1620"/>
@@ -4859,15 +7063,15 @@
               <a:buChar char="•"/>
             </a:pPr>
             <a:r>
-              <a:rPr lang="en-US" sz="1200" b="1" dirty="0">
-                <a:solidFill>
-                  <a:srgbClr val="1C2833"/>
-                </a:solidFill>
-                <a:latin typeface="Arial" pitchFamily="34" charset="0"/>
-                <a:ea typeface="Arial" pitchFamily="34" charset="-122"/>
-                <a:cs typeface="Arial" pitchFamily="34" charset="-120"/>
-              </a:rPr>
-              <a:t>Tier up:</a:t>
+              <a:rPr lang="en-US" sz="1200" i="1" dirty="0">
+                <a:solidFill>
+                  <a:srgbClr val="1C2833"/>
+                </a:solidFill>
+                <a:latin typeface="Arial" pitchFamily="34" charset="0"/>
+                <a:ea typeface="Arial" pitchFamily="34" charset="-122"/>
+                <a:cs typeface="Arial" pitchFamily="34" charset="-120"/>
+              </a:rPr>
+              <a:t>Āhāra</a:t>
             </a:r>
             <a:pPr algn="l" indent="0" marL="0">
               <a:lnSpc>
@@ -4887,7 +7091,7 @@
                 <a:ea typeface="Arial" pitchFamily="34" charset="-122"/>
                 <a:cs typeface="Arial" pitchFamily="34" charset="-120"/>
               </a:rPr>
-              <a:t> Read Bryant (2009) commentary on BG 6.17.</a:t>
+              <a:t> — eating</a:t>
             </a:r>
             <a:endParaRPr lang="en-US" sz="1200" dirty="0"/>
           </a:p>
@@ -4903,15 +7107,15 @@
               <a:buChar char="•"/>
             </a:pPr>
             <a:r>
-              <a:rPr lang="en-US" sz="1200" b="1" dirty="0">
-                <a:solidFill>
-                  <a:srgbClr val="1C2833"/>
-                </a:solidFill>
-                <a:latin typeface="Arial" pitchFamily="34" charset="0"/>
-                <a:ea typeface="Arial" pitchFamily="34" charset="-122"/>
-                <a:cs typeface="Arial" pitchFamily="34" charset="-120"/>
-              </a:rPr>
-              <a:t>Tier down:</a:t>
+              <a:rPr lang="en-US" sz="1200" i="1" dirty="0">
+                <a:solidFill>
+                  <a:srgbClr val="1C2833"/>
+                </a:solidFill>
+                <a:latin typeface="Arial" pitchFamily="34" charset="0"/>
+                <a:ea typeface="Arial" pitchFamily="34" charset="-122"/>
+                <a:cs typeface="Arial" pitchFamily="34" charset="-120"/>
+              </a:rPr>
+              <a:t>Vihāra</a:t>
             </a:r>
             <a:pPr algn="l" indent="0" marL="0">
               <a:lnSpc>
@@ -4931,15 +7135,147 @@
                 <a:ea typeface="Arial" pitchFamily="34" charset="-122"/>
                 <a:cs typeface="Arial" pitchFamily="34" charset="-120"/>
               </a:rPr>
-              <a:t> Memorise the 5 activities only.</a:t>
+              <a:t> — recreation, lifestyle</a:t>
             </a:r>
             <a:endParaRPr lang="en-US" sz="1200" dirty="0"/>
           </a:p>
-        </p:txBody>
-      </p:sp>
-      <p:sp>
-        <p:nvSpPr>
-          <p:cNvPr id="5" name="Text 3"/>
+          <a:p>
+            <a:pPr algn="l" marL="342900" indent="-342900">
+              <a:lnSpc>
+                <a:spcPts val="1620"/>
+              </a:lnSpc>
+              <a:spcAft>
+                <a:spcPts val="300"/>
+              </a:spcAft>
+              <a:buSzPct val="100000"/>
+              <a:buChar char="•"/>
+            </a:pPr>
+            <a:r>
+              <a:rPr lang="en-US" sz="1200" i="1" dirty="0">
+                <a:solidFill>
+                  <a:srgbClr val="1C2833"/>
+                </a:solidFill>
+                <a:latin typeface="Arial" pitchFamily="34" charset="0"/>
+                <a:ea typeface="Arial" pitchFamily="34" charset="-122"/>
+                <a:cs typeface="Arial" pitchFamily="34" charset="-120"/>
+              </a:rPr>
+              <a:t>Ceṣṭā in karma</a:t>
+            </a:r>
+            <a:pPr algn="l" indent="0" marL="0">
+              <a:lnSpc>
+                <a:spcPts val="1620"/>
+              </a:lnSpc>
+              <a:spcAft>
+                <a:spcPts val="300"/>
+              </a:spcAft>
+              <a:buNone/>
+            </a:pPr>
+            <a:r>
+              <a:rPr lang="en-US" sz="1200" dirty="0">
+                <a:solidFill>
+                  <a:srgbClr val="1C2833"/>
+                </a:solidFill>
+                <a:latin typeface="Arial" pitchFamily="34" charset="0"/>
+                <a:ea typeface="Arial" pitchFamily="34" charset="-122"/>
+                <a:cs typeface="Arial" pitchFamily="34" charset="-120"/>
+              </a:rPr>
+              <a:t> — effort in work</a:t>
+            </a:r>
+            <a:endParaRPr lang="en-US" sz="1200" dirty="0"/>
+          </a:p>
+          <a:p>
+            <a:pPr algn="l" marL="342900" indent="-342900">
+              <a:lnSpc>
+                <a:spcPts val="1620"/>
+              </a:lnSpc>
+              <a:spcAft>
+                <a:spcPts val="300"/>
+              </a:spcAft>
+              <a:buSzPct val="100000"/>
+              <a:buChar char="•"/>
+            </a:pPr>
+            <a:r>
+              <a:rPr lang="en-US" sz="1200" i="1" dirty="0">
+                <a:solidFill>
+                  <a:srgbClr val="1C2833"/>
+                </a:solidFill>
+                <a:latin typeface="Arial" pitchFamily="34" charset="0"/>
+                <a:ea typeface="Arial" pitchFamily="34" charset="-122"/>
+                <a:cs typeface="Arial" pitchFamily="34" charset="-120"/>
+              </a:rPr>
+              <a:t>Svapna</a:t>
+            </a:r>
+            <a:pPr algn="l" indent="0" marL="0">
+              <a:lnSpc>
+                <a:spcPts val="1620"/>
+              </a:lnSpc>
+              <a:spcAft>
+                <a:spcPts val="300"/>
+              </a:spcAft>
+              <a:buNone/>
+            </a:pPr>
+            <a:r>
+              <a:rPr lang="en-US" sz="1200" dirty="0">
+                <a:solidFill>
+                  <a:srgbClr val="1C2833"/>
+                </a:solidFill>
+                <a:latin typeface="Arial" pitchFamily="34" charset="0"/>
+                <a:ea typeface="Arial" pitchFamily="34" charset="-122"/>
+                <a:cs typeface="Arial" pitchFamily="34" charset="-120"/>
+              </a:rPr>
+              <a:t> — sleep</a:t>
+            </a:r>
+            <a:endParaRPr lang="en-US" sz="1200" dirty="0"/>
+          </a:p>
+          <a:p>
+            <a:pPr algn="l" marL="342900" indent="-342900">
+              <a:lnSpc>
+                <a:spcPts val="1620"/>
+              </a:lnSpc>
+              <a:spcAft>
+                <a:spcPts val="300"/>
+              </a:spcAft>
+              <a:buSzPct val="100000"/>
+              <a:buChar char="•"/>
+            </a:pPr>
+            <a:r>
+              <a:rPr lang="en-US" sz="1200" i="1" dirty="0">
+                <a:solidFill>
+                  <a:srgbClr val="1C2833"/>
+                </a:solidFill>
+                <a:latin typeface="Arial" pitchFamily="34" charset="0"/>
+                <a:ea typeface="Arial" pitchFamily="34" charset="-122"/>
+                <a:cs typeface="Arial" pitchFamily="34" charset="-120"/>
+              </a:rPr>
+              <a:t>Avabodha</a:t>
+            </a:r>
+            <a:pPr algn="l" indent="0" marL="0">
+              <a:lnSpc>
+                <a:spcPts val="1620"/>
+              </a:lnSpc>
+              <a:spcAft>
+                <a:spcPts val="300"/>
+              </a:spcAft>
+              <a:buNone/>
+            </a:pPr>
+            <a:r>
+              <a:rPr lang="en-US" sz="1200" dirty="0">
+                <a:solidFill>
+                  <a:srgbClr val="1C2833"/>
+                </a:solidFill>
+                <a:latin typeface="Arial" pitchFamily="34" charset="0"/>
+                <a:ea typeface="Arial" pitchFamily="34" charset="-122"/>
+                <a:cs typeface="Arial" pitchFamily="34" charset="-120"/>
+              </a:rPr>
+              <a:t> — waking</a:t>
+            </a:r>
+            <a:endParaRPr lang="en-US" sz="1200" dirty="0"/>
+          </a:p>
+        </p:txBody>
+      </p:sp>
+      <p:sp>
+        <p:nvSpPr>
+          <p:cNvPr id="6" name="Text 4"/>
           <p:cNvSpPr/>
           <p:nvPr/>
         </p:nvSpPr>
